--- a/presentation_oral.pptx
+++ b/presentation_oral.pptx
@@ -7054,7 +7054,7 @@
                   <a:srgbClr val="1F4E79"/>
                 </a:solidFill>
               </a:rPr>
-              <a:t>Important : DEUX mesures complémentaires</a:t>
+              <a:t>Important : TROIS mesures complementaires</a:t>
             </a:r>
           </a:p>
           <a:p>
@@ -7098,7 +7098,7 @@
                   <a:srgbClr val="2C8C5A"/>
                 </a:solidFill>
               </a:rPr>
-              <a:t>Protocole officiel Data Battle</a:t>
+              <a:t>Protocole officiel oracle (1 pred / last CG)</a:t>
             </a:r>
             <a:r>
               <a:rPr sz="1300">
@@ -7106,7 +7106,33 @@
                   <a:srgbClr val="000000"/>
                 </a:solidFill>
               </a:rPr>
-              <a:t> : 1 prédiction par alerte au last CG → 0,60 % de risque, gain ~330 h</a:t>
+              <a:t> : 0,60 % de risque, gain ~330 h</a:t>
+            </a:r>
+          </a:p>
+          <a:p>
+            <a:r>
+              <a:rPr sz="1300">
+                <a:solidFill>
+                  <a:srgbClr val="000000"/>
+                </a:solidFill>
+              </a:rPr>
+              <a:t>   - </a:t>
+            </a:r>
+            <a:r>
+              <a:rPr sz="1300" b="1">
+                <a:solidFill>
+                  <a:srgbClr val="2C8C5A"/>
+                </a:solidFill>
+              </a:rPr>
+              <a:t>Protocole officiel sweep theta (realiste)</a:t>
+            </a:r>
+            <a:r>
+              <a:rPr sz="1300">
+                <a:solidFill>
+                  <a:srgbClr val="000000"/>
+                </a:solidFill>
+              </a:rPr>
+              <a:t> : min R = 3,61 % a theta=0,95, gain 26 h</a:t>
             </a:r>
           </a:p>
         </p:txBody>

--- a/presentation_oral.pptx
+++ b/presentation_oral.pptx
@@ -149,7 +149,7 @@
   <pc:docChgLst>
     <pc:chgData name="Enrique Alves" userId="5d13ffe67fcee0a0" providerId="LiveId" clId="{6B2B118D-CA2E-4A9B-BC7D-9BAAFE503825}"/>
     <pc:docChg chg="modSld">
-      <pc:chgData name="Enrique Alves" userId="5d13ffe67fcee0a0" providerId="LiveId" clId="{6B2B118D-CA2E-4A9B-BC7D-9BAAFE503825}" dt="2026-05-21T17:35:12.258" v="11" actId="1076"/>
+      <pc:chgData name="Enrique Alves" userId="5d13ffe67fcee0a0" providerId="LiveId" clId="{6B2B118D-CA2E-4A9B-BC7D-9BAAFE503825}" dt="2026-05-21T19:20:51.831" v="18" actId="14734"/>
       <pc:docMkLst>
         <pc:docMk/>
       </pc:docMkLst>
@@ -198,6 +198,60 @@
             <ac:picMk id="9" creationId="{00000000-0000-0000-0000-000000000000}"/>
           </ac:picMkLst>
         </pc:picChg>
+      </pc:sldChg>
+      <pc:sldChg chg="modSp mod">
+        <pc:chgData name="Enrique Alves" userId="5d13ffe67fcee0a0" providerId="LiveId" clId="{6B2B118D-CA2E-4A9B-BC7D-9BAAFE503825}" dt="2026-05-21T19:20:51.831" v="18" actId="14734"/>
+        <pc:sldMkLst>
+          <pc:docMk/>
+          <pc:sldMk cId="0" sldId="267"/>
+        </pc:sldMkLst>
+        <pc:spChg chg="mod">
+          <ac:chgData name="Enrique Alves" userId="5d13ffe67fcee0a0" providerId="LiveId" clId="{6B2B118D-CA2E-4A9B-BC7D-9BAAFE503825}" dt="2026-05-21T19:20:45.072" v="15" actId="1076"/>
+          <ac:spMkLst>
+            <pc:docMk/>
+            <pc:sldMk cId="0" sldId="267"/>
+            <ac:spMk id="4" creationId="{00000000-0000-0000-0000-000000000000}"/>
+          </ac:spMkLst>
+        </pc:spChg>
+        <pc:graphicFrameChg chg="modGraphic">
+          <ac:chgData name="Enrique Alves" userId="5d13ffe67fcee0a0" providerId="LiveId" clId="{6B2B118D-CA2E-4A9B-BC7D-9BAAFE503825}" dt="2026-05-21T19:20:51.831" v="18" actId="14734"/>
+          <ac:graphicFrameMkLst>
+            <pc:docMk/>
+            <pc:sldMk cId="0" sldId="267"/>
+            <ac:graphicFrameMk id="7" creationId="{00000000-0000-0000-0000-000000000000}"/>
+          </ac:graphicFrameMkLst>
+        </pc:graphicFrameChg>
+        <pc:picChg chg="mod">
+          <ac:chgData name="Enrique Alves" userId="5d13ffe67fcee0a0" providerId="LiveId" clId="{6B2B118D-CA2E-4A9B-BC7D-9BAAFE503825}" dt="2026-05-21T19:20:47.831" v="16" actId="1076"/>
+          <ac:picMkLst>
+            <pc:docMk/>
+            <pc:sldMk cId="0" sldId="267"/>
+            <ac:picMk id="5" creationId="{00000000-0000-0000-0000-000000000000}"/>
+          </ac:picMkLst>
+        </pc:picChg>
+      </pc:sldChg>
+      <pc:sldChg chg="modSp mod">
+        <pc:chgData name="Enrique Alves" userId="5d13ffe67fcee0a0" providerId="LiveId" clId="{6B2B118D-CA2E-4A9B-BC7D-9BAAFE503825}" dt="2026-05-21T19:20:37.943" v="13" actId="1076"/>
+        <pc:sldMkLst>
+          <pc:docMk/>
+          <pc:sldMk cId="0" sldId="268"/>
+        </pc:sldMkLst>
+        <pc:spChg chg="mod">
+          <ac:chgData name="Enrique Alves" userId="5d13ffe67fcee0a0" providerId="LiveId" clId="{6B2B118D-CA2E-4A9B-BC7D-9BAAFE503825}" dt="2026-05-21T19:20:37.943" v="13" actId="1076"/>
+          <ac:spMkLst>
+            <pc:docMk/>
+            <pc:sldMk cId="0" sldId="268"/>
+            <ac:spMk id="7" creationId="{00000000-0000-0000-0000-000000000000}"/>
+          </ac:spMkLst>
+        </pc:spChg>
+        <pc:graphicFrameChg chg="mod">
+          <ac:chgData name="Enrique Alves" userId="5d13ffe67fcee0a0" providerId="LiveId" clId="{6B2B118D-CA2E-4A9B-BC7D-9BAAFE503825}" dt="2026-05-21T19:20:35.875" v="12" actId="1076"/>
+          <ac:graphicFrameMkLst>
+            <pc:docMk/>
+            <pc:sldMk cId="0" sldId="268"/>
+            <ac:graphicFrameMk id="6" creationId="{00000000-0000-0000-0000-000000000000}"/>
+          </ac:graphicFrameMkLst>
+        </pc:graphicFrameChg>
       </pc:sldChg>
       <pc:sldChg chg="modSp mod">
         <pc:chgData name="Enrique Alves" userId="5d13ffe67fcee0a0" providerId="LiveId" clId="{6B2B118D-CA2E-4A9B-BC7D-9BAAFE503825}" dt="2026-05-21T17:34:57.954" v="8" actId="1076"/>
@@ -4678,7 +4732,7 @@
         </p:nvSpPr>
         <p:spPr>
           <a:xfrm>
-            <a:off x="457200" y="1371600"/>
+            <a:off x="457200" y="1116683"/>
             <a:ext cx="11247120" cy="914400"/>
           </a:xfrm>
           <a:prstGeom prst="roundRect">
@@ -4713,22 +4767,115 @@
           <a:p>
             <a:pPr algn="ctr"/>
             <a:r>
-              <a:rPr sz="1500" b="1">
+              <a:rPr sz="1500" b="1" dirty="0">
                 <a:solidFill>
                   <a:srgbClr val="2C8C5A"/>
                 </a:solidFill>
               </a:rPr>
-              <a:t>DÉFINITION : Winsorization</a:t>
-            </a:r>
-          </a:p>
-          <a:p>
-            <a:r>
-              <a:rPr sz="1300">
+              <a:t>DÉFINITION : </a:t>
+            </a:r>
+            <a:r>
+              <a:rPr sz="1500" b="1" dirty="0" err="1">
+                <a:solidFill>
+                  <a:srgbClr val="2C8C5A"/>
+                </a:solidFill>
+              </a:rPr>
+              <a:t>Winsorization</a:t>
+            </a:r>
+            <a:endParaRPr sz="1500" b="1" dirty="0">
+              <a:solidFill>
+                <a:srgbClr val="2C8C5A"/>
+              </a:solidFill>
+            </a:endParaRPr>
+          </a:p>
+          <a:p>
+            <a:r>
+              <a:rPr sz="1300" dirty="0">
                 <a:solidFill>
                   <a:srgbClr val="000000"/>
                 </a:solidFill>
               </a:rPr>
-              <a:t>On remplace les valeurs au-dessus du percentile 95 par la valeur du P95. Retire l'effet des outliers SANS les supprimer.</a:t>
+              <a:t>On </a:t>
+            </a:r>
+            <a:r>
+              <a:rPr sz="1300" dirty="0" err="1">
+                <a:solidFill>
+                  <a:srgbClr val="000000"/>
+                </a:solidFill>
+              </a:rPr>
+              <a:t>remplace</a:t>
+            </a:r>
+            <a:r>
+              <a:rPr sz="1300" dirty="0">
+                <a:solidFill>
+                  <a:srgbClr val="000000"/>
+                </a:solidFill>
+              </a:rPr>
+              <a:t> les </a:t>
+            </a:r>
+            <a:r>
+              <a:rPr sz="1300" dirty="0" err="1">
+                <a:solidFill>
+                  <a:srgbClr val="000000"/>
+                </a:solidFill>
+              </a:rPr>
+              <a:t>valeurs</a:t>
+            </a:r>
+            <a:r>
+              <a:rPr sz="1300" dirty="0">
+                <a:solidFill>
+                  <a:srgbClr val="000000"/>
+                </a:solidFill>
+              </a:rPr>
+              <a:t> au-dessus du percentile 95 par la </a:t>
+            </a:r>
+            <a:r>
+              <a:rPr sz="1300" dirty="0" err="1">
+                <a:solidFill>
+                  <a:srgbClr val="000000"/>
+                </a:solidFill>
+              </a:rPr>
+              <a:t>valeur</a:t>
+            </a:r>
+            <a:r>
+              <a:rPr sz="1300" dirty="0">
+                <a:solidFill>
+                  <a:srgbClr val="000000"/>
+                </a:solidFill>
+              </a:rPr>
+              <a:t> du P95. Retire </a:t>
+            </a:r>
+            <a:r>
+              <a:rPr sz="1300" dirty="0" err="1">
+                <a:solidFill>
+                  <a:srgbClr val="000000"/>
+                </a:solidFill>
+              </a:rPr>
+              <a:t>l'effet</a:t>
+            </a:r>
+            <a:r>
+              <a:rPr sz="1300" dirty="0">
+                <a:solidFill>
+                  <a:srgbClr val="000000"/>
+                </a:solidFill>
+              </a:rPr>
+              <a:t> des outliers SANS les </a:t>
+            </a:r>
+            <a:r>
+              <a:rPr sz="1300" dirty="0" err="1">
+                <a:solidFill>
+                  <a:srgbClr val="000000"/>
+                </a:solidFill>
+              </a:rPr>
+              <a:t>supprimer</a:t>
+            </a:r>
+            <a:r>
+              <a:rPr sz="1300" dirty="0">
+                <a:solidFill>
+                  <a:srgbClr val="000000"/>
+                </a:solidFill>
+              </a:rPr>
+              <a:t>.</a:t>
             </a:r>
           </a:p>
         </p:txBody>
@@ -4749,7 +4896,7 @@
         </p:blipFill>
         <p:spPr>
           <a:xfrm>
-            <a:off x="2743200" y="2468880"/>
+            <a:off x="2743200" y="2084534"/>
             <a:ext cx="6675120" cy="1298746"/>
           </a:xfrm>
           <a:prstGeom prst="rect">
@@ -4787,11 +4934,17 @@
           <p:cNvGraphicFramePr>
             <a:graphicFrameLocks noGrp="1"/>
           </p:cNvGraphicFramePr>
-          <p:nvPr/>
+          <p:nvPr>
+            <p:extLst>
+              <p:ext uri="{D42A27DB-BD31-4B8C-83A1-F6EECF244321}">
+                <p14:modId xmlns:p14="http://schemas.microsoft.com/office/powerpoint/2010/main" val="3959410788"/>
+              </p:ext>
+            </p:extLst>
+          </p:nvPr>
         </p:nvGraphicFramePr>
         <p:xfrm>
-          <a:off x="457200" y="4297680"/>
-          <a:ext cx="11247120" cy="1828800"/>
+          <a:off x="457200" y="4810760"/>
+          <a:ext cx="11247120" cy="1661160"/>
         </p:xfrm>
         <a:graphic>
           <a:graphicData uri="http://schemas.openxmlformats.org/drawingml/2006/table">
@@ -4829,7 +4982,7 @@
                   </a:extLst>
                 </a:gridCol>
               </a:tblGrid>
-              <a:tr h="457200">
+              <a:tr h="0">
                 <a:tc>
                   <a:txBody>
                     <a:bodyPr/>
@@ -4859,12 +5012,20 @@
                     <a:p>
                       <a:pPr algn="ctr"/>
                       <a:r>
-                        <a:rPr sz="1300" b="1">
+                        <a:rPr sz="1300" b="1" dirty="0" err="1">
                           <a:solidFill>
                             <a:srgbClr val="FFFFFF"/>
                           </a:solidFill>
                         </a:rPr>
-                        <a:t>c_q brut</a:t>
+                        <a:t>c_q</a:t>
+                      </a:r>
+                      <a:r>
+                        <a:rPr sz="1300" b="1" dirty="0">
+                          <a:solidFill>
+                            <a:srgbClr val="FFFFFF"/>
+                          </a:solidFill>
+                        </a:rPr>
+                        <a:t> brut</a:t>
                       </a:r>
                     </a:p>
                   </a:txBody>
@@ -5112,7 +5273,7 @@
                     <a:p>
                       <a:pPr algn="ctr"/>
                       <a:r>
-                        <a:rPr sz="1300" b="1">
+                        <a:rPr sz="1300" b="1" dirty="0">
                           <a:solidFill>
                             <a:srgbClr val="2C8C5A"/>
                           </a:solidFill>
@@ -5321,10 +5482,16 @@
           <p:cNvGraphicFramePr>
             <a:graphicFrameLocks noGrp="1"/>
           </p:cNvGraphicFramePr>
-          <p:nvPr/>
+          <p:nvPr>
+            <p:extLst>
+              <p:ext uri="{D42A27DB-BD31-4B8C-83A1-F6EECF244321}">
+                <p14:modId xmlns:p14="http://schemas.microsoft.com/office/powerpoint/2010/main" val="1718942030"/>
+              </p:ext>
+            </p:extLst>
+          </p:nvPr>
         </p:nvGraphicFramePr>
         <p:xfrm>
-          <a:off x="457200" y="3474720"/>
+          <a:off x="381000" y="4765597"/>
           <a:ext cx="5943600" cy="1828800"/>
         </p:xfrm>
         <a:graphic>
@@ -5500,7 +5667,7 @@
                     <a:p>
                       <a:pPr algn="ctr"/>
                       <a:r>
-                        <a:rPr sz="1300"/>
+                        <a:rPr sz="1300" dirty="0"/>
                         <a:t>28 min</a:t>
                       </a:r>
                     </a:p>
@@ -5571,12 +5738,44 @@
                     <a:p>
                       <a:pPr algn="ctr"/>
                       <a:r>
-                        <a:rPr sz="1300" b="1">
+                        <a:rPr sz="1300" b="1" dirty="0">
                           <a:solidFill>
                             <a:srgbClr val="2C8C5A"/>
                           </a:solidFill>
                         </a:rPr>
-                        <a:t>0 (= règle Météorage)</a:t>
+                        <a:t>0 (= </a:t>
+                      </a:r>
+                      <a:r>
+                        <a:rPr sz="1300" b="1" dirty="0" err="1">
+                          <a:solidFill>
+                            <a:srgbClr val="2C8C5A"/>
+                          </a:solidFill>
+                        </a:rPr>
+                        <a:t>règle</a:t>
+                      </a:r>
+                      <a:r>
+                        <a:rPr sz="1300" b="1" dirty="0">
+                          <a:solidFill>
+                            <a:srgbClr val="2C8C5A"/>
+                          </a:solidFill>
+                        </a:rPr>
+                        <a:t> </a:t>
+                      </a:r>
+                      <a:r>
+                        <a:rPr sz="1300" b="1" dirty="0" err="1">
+                          <a:solidFill>
+                            <a:srgbClr val="2C8C5A"/>
+                          </a:solidFill>
+                        </a:rPr>
+                        <a:t>Météorage</a:t>
+                      </a:r>
+                      <a:r>
+                        <a:rPr sz="1300" b="1" dirty="0">
+                          <a:solidFill>
+                            <a:srgbClr val="2C8C5A"/>
+                          </a:solidFill>
+                        </a:rPr>
+                        <a:t>)</a:t>
                       </a:r>
                     </a:p>
                   </a:txBody>
@@ -5600,7 +5799,7 @@
         </p:nvSpPr>
         <p:spPr>
           <a:xfrm>
-            <a:off x="6675120" y="3474720"/>
+            <a:off x="6702425" y="4617720"/>
             <a:ext cx="5029200" cy="2011680"/>
           </a:xfrm>
           <a:prstGeom prst="roundRect">

--- a/presentation_oral.pptx
+++ b/presentation_oral.pptx
@@ -6661,7 +6661,7 @@
               </a:defRPr>
             </a:pPr>
             <a:r>
-              <a:t>15. Résultats sur eval 2023-25</a:t>
+              <a:t>15. Resultats sur eval — protocole officiel Data Battle</a:t>
             </a:r>
           </a:p>
         </p:txBody>
@@ -6696,7 +6696,7 @@
               </a:defRPr>
             </a:pPr>
             <a:r>
-              <a:t>Risque CG / 3 km vs baseline 30 min</a:t>
+              <a:t>Sweep theta sur confidence S(30|X) + min par alerte</a:t>
             </a:r>
           </a:p>
         </p:txBody>
@@ -6769,7 +6769,7 @@
                             <a:srgbClr val="FFFFFF"/>
                           </a:solidFill>
                         </a:rPr>
-                        <a:t>q</a:t>
+                        <a:t>theta</a:t>
                       </a:r>
                     </a:p>
                   </a:txBody>
@@ -6791,7 +6791,7 @@
                             <a:srgbClr val="FFFFFF"/>
                           </a:solidFill>
                         </a:rPr>
-                        <a:t>Cible 1−q</a:t>
+                        <a:t>Predictions filtrees</a:t>
                       </a:r>
                     </a:p>
                   </a:txBody>
@@ -6813,7 +6813,7 @@
                             <a:srgbClr val="FFFFFF"/>
                           </a:solidFill>
                         </a:rPr>
-                        <a:t>Levées prématurées</a:t>
+                        <a:t>Incidents / 1995</a:t>
                       </a:r>
                     </a:p>
                   </a:txBody>
@@ -6835,7 +6835,7 @@
                             <a:srgbClr val="FFFFFF"/>
                           </a:solidFill>
                         </a:rPr>
-                        <a:t>Incidents</a:t>
+                        <a:t>Risque reel</a:t>
                       </a:r>
                     </a:p>
                   </a:txBody>
@@ -6857,7 +6857,7 @@
                             <a:srgbClr val="FFFFFF"/>
                           </a:solidFill>
                         </a:rPr>
-                        <a:t>Risque réel</a:t>
+                        <a:t>Gain cumule</a:t>
                       </a:r>
                     </a:p>
                   </a:txBody>
@@ -6882,7 +6882,7 @@
                       <a:pPr algn="l"/>
                       <a:r>
                         <a:rPr sz="1300"/>
-                        <a:t>0,90</a:t>
+                        <a:t>0,00</a:t>
                       </a:r>
                     </a:p>
                   </a:txBody>
@@ -6896,7 +6896,7 @@
                       <a:pPr algn="ctr"/>
                       <a:r>
                         <a:rPr sz="1300"/>
-                        <a:t>10 %</a:t>
+                        <a:t>toutes (multi-pred)</a:t>
                       </a:r>
                     </a:p>
                   </a:txBody>
@@ -6910,7 +6910,7 @@
                       <a:pPr algn="ctr"/>
                       <a:r>
                         <a:rPr sz="1300"/>
-                        <a:t>2 052</a:t>
+                        <a:t>1 947</a:t>
                       </a:r>
                     </a:p>
                   </a:txBody>
@@ -6924,7 +6924,7 @@
                       <a:pPr algn="ctr"/>
                       <a:r>
                         <a:rPr sz="1300"/>
-                        <a:t>54</a:t>
+                        <a:t>97,59 %</a:t>
                       </a:r>
                     </a:p>
                   </a:txBody>
@@ -6938,7 +6938,7 @@
                       <a:pPr algn="ctr"/>
                       <a:r>
                         <a:rPr sz="1300"/>
-                        <a:t>14,03 %</a:t>
+                        <a:t>1 125 h</a:t>
                       </a:r>
                     </a:p>
                   </a:txBody>
@@ -6959,7 +6959,7 @@
                       <a:pPr algn="l"/>
                       <a:r>
                         <a:rPr sz="1300"/>
-                        <a:t>0,95</a:t>
+                        <a:t>0,50</a:t>
                       </a:r>
                     </a:p>
                   </a:txBody>
@@ -6973,7 +6973,7 @@
                       <a:pPr algn="ctr"/>
                       <a:r>
                         <a:rPr sz="1300"/>
-                        <a:t>5 %</a:t>
+                        <a:t>filtre intermediaire</a:t>
                       </a:r>
                     </a:p>
                   </a:txBody>
@@ -6987,7 +6987,7 @@
                       <a:pPr algn="ctr"/>
                       <a:r>
                         <a:rPr sz="1300"/>
-                        <a:t>1 151</a:t>
+                        <a:t>  304</a:t>
                       </a:r>
                     </a:p>
                   </a:txBody>
@@ -7001,7 +7001,7 @@
                       <a:pPr algn="ctr"/>
                       <a:r>
                         <a:rPr sz="1300"/>
-                        <a:t>37</a:t>
+                        <a:t>15,24 %</a:t>
                       </a:r>
                     </a:p>
                   </a:txBody>
@@ -7015,7 +7015,7 @@
                       <a:pPr algn="ctr"/>
                       <a:r>
                         <a:rPr sz="1300"/>
-                        <a:t>9,61 %</a:t>
+                        <a:t>   76 h</a:t>
                       </a:r>
                     </a:p>
                   </a:txBody>
@@ -7036,7 +7036,7 @@
                       <a:pPr algn="l"/>
                       <a:r>
                         <a:rPr sz="1300"/>
-                        <a:t>0,99</a:t>
+                        <a:t>0,75</a:t>
                       </a:r>
                     </a:p>
                   </a:txBody>
@@ -7050,7 +7050,7 @@
                       <a:pPr algn="ctr"/>
                       <a:r>
                         <a:rPr sz="1300"/>
-                        <a:t>1 %</a:t>
+                        <a:t>filtre strict</a:t>
                       </a:r>
                     </a:p>
                   </a:txBody>
@@ -7064,7 +7064,7 @@
                       <a:pPr algn="ctr"/>
                       <a:r>
                         <a:rPr sz="1300"/>
-                        <a:t>590</a:t>
+                        <a:t>   81</a:t>
                       </a:r>
                     </a:p>
                   </a:txBody>
@@ -7078,7 +7078,7 @@
                       <a:pPr algn="ctr"/>
                       <a:r>
                         <a:rPr sz="1300"/>
-                        <a:t>15</a:t>
+                        <a:t> 4,06 %</a:t>
                       </a:r>
                     </a:p>
                   </a:txBody>
@@ -7092,7 +7092,7 @@
                       <a:pPr algn="ctr"/>
                       <a:r>
                         <a:rPr sz="1300"/>
-                        <a:t>3,90 %</a:t>
+                        <a:t>   53 h</a:t>
                       </a:r>
                     </a:p>
                   </a:txBody>
@@ -7117,7 +7117,7 @@
                             <a:srgbClr val="2C8C5A"/>
                           </a:solidFill>
                         </a:rPr>
-                        <a:t>Baseline 30 min</a:t>
+                        <a:t>0,95</a:t>
                       </a:r>
                     </a:p>
                   </a:txBody>
@@ -7135,7 +7135,7 @@
                             <a:srgbClr val="2C8C5A"/>
                           </a:solidFill>
                         </a:rPr>
-                        <a:t>—</a:t>
+                        <a:t>filtre tres strict</a:t>
                       </a:r>
                     </a:p>
                   </a:txBody>
@@ -7153,7 +7153,7 @@
                             <a:srgbClr val="2C8C5A"/>
                           </a:solidFill>
                         </a:rPr>
-                        <a:t>—</a:t>
+                        <a:t>   72</a:t>
                       </a:r>
                     </a:p>
                   </a:txBody>
@@ -7171,7 +7171,7 @@
                             <a:srgbClr val="2C8C5A"/>
                           </a:solidFill>
                         </a:rPr>
-                        <a:t>4</a:t>
+                        <a:t> 3,61 %</a:t>
                       </a:r>
                     </a:p>
                   </a:txBody>
@@ -7189,7 +7189,7 @@
                             <a:srgbClr val="2C8C5A"/>
                           </a:solidFill>
                         </a:rPr>
-                        <a:t>1,04 %</a:t>
+                        <a:t>   26 h</a:t>
                       </a:r>
                     </a:p>
                   </a:txBody>
@@ -7253,7 +7253,7 @@
                   <a:srgbClr val="1F4E79"/>
                 </a:solidFill>
               </a:rPr>
-              <a:t>Important : TROIS mesures complementaires</a:t>
+              <a:t>Protocole officiel reproduit du notebook Evaluation_databattle_meteorage</a:t>
             </a:r>
           </a:p>
           <a:p>
@@ -7263,7 +7263,7 @@
                   <a:srgbClr val="000000"/>
                 </a:solidFill>
               </a:rPr>
-              <a:t>   - </a:t>
+              <a:t>   - Generation predictions.csv (1 pred / CG, confidence = S(30 min | X))</a:t>
             </a:r>
             <a:r>
               <a:rPr sz="1300" b="1">
@@ -7271,7 +7271,7 @@
                   <a:srgbClr val="A83232"/>
                 </a:solidFill>
               </a:rPr>
-              <a:t>Mesure dynamique (ci-dessus, à chaque CG)</a:t>
+              <a:t/>
             </a:r>
             <a:r>
               <a:rPr sz="1300">
@@ -7279,7 +7279,7 @@
                   <a:srgbClr val="000000"/>
                 </a:solidFill>
               </a:rPr>
-              <a:t> : 37 incidents à q=0,95 → 9,61 % → visualisables sur Streamlit</a:t>
+              <a:t/>
             </a:r>
           </a:p>
           <a:p>
@@ -7289,7 +7289,7 @@
                   <a:srgbClr val="000000"/>
                 </a:solidFill>
               </a:rPr>
-              <a:t>   - </a:t>
+              <a:t>   - Sweep theta : on garde les preds avec confidence &gt;= theta, min par alerte</a:t>
             </a:r>
             <a:r>
               <a:rPr sz="1300" b="1">
@@ -7297,7 +7297,7 @@
                   <a:srgbClr val="2C8C5A"/>
                 </a:solidFill>
               </a:rPr>
-              <a:t>Protocole officiel oracle (1 pred / last CG)</a:t>
+              <a:t/>
             </a:r>
             <a:r>
               <a:rPr sz="1300">
@@ -7305,7 +7305,7 @@
                   <a:srgbClr val="000000"/>
                 </a:solidFill>
               </a:rPr>
-              <a:t> : 0,60 % de risque, gain ~330 h</a:t>
+              <a:t/>
             </a:r>
           </a:p>
           <a:p>
@@ -7315,7 +7315,7 @@
                   <a:srgbClr val="000000"/>
                 </a:solidFill>
               </a:rPr>
-              <a:t>   - </a:t>
+              <a:t>   - Meilleur point operationnel : theta=0,95 → R=3,61 %, gain 26 h</a:t>
             </a:r>
             <a:r>
               <a:rPr sz="1300" b="1">
@@ -7323,7 +7323,7 @@
                   <a:srgbClr val="2C8C5A"/>
                 </a:solidFill>
               </a:rPr>
-              <a:t>Protocole officiel sweep theta (realiste)</a:t>
+              <a:t/>
             </a:r>
             <a:r>
               <a:rPr sz="1300">
@@ -7331,7 +7331,59 @@
                   <a:srgbClr val="000000"/>
                 </a:solidFill>
               </a:rPr>
-              <a:t> : min R = 3,61 % a theta=0,95, gain 26 h</a:t>
+              <a:t/>
+            </a:r>
+          </a:p>
+          <a:p>
+            <a:r>
+              <a:rPr sz="1300">
+                <a:solidFill>
+                  <a:srgbClr val="000000"/>
+                </a:solidFill>
+              </a:rPr>
+              <a:t>   - Borne oracle (last CG connu, q=0,95) : R=0,60 %, gain ~330 h</a:t>
+            </a:r>
+            <a:r>
+              <a:rPr sz="1300" b="1">
+                <a:solidFill>
+                  <a:srgbClr val="2C8C5A"/>
+                </a:solidFill>
+              </a:rPr>
+              <a:t/>
+            </a:r>
+            <a:r>
+              <a:rPr sz="1300">
+                <a:solidFill>
+                  <a:srgbClr val="000000"/>
+                </a:solidFill>
+              </a:rPr>
+              <a:t/>
+            </a:r>
+          </a:p>
+          <a:p>
+            <a:r>
+              <a:rPr sz="1300">
+                <a:solidFill>
+                  <a:srgbClr val="000000"/>
+                </a:solidFill>
+              </a:rPr>
+              <a:t>   - Baseline Meteorage 30 min : R=1,04 % (reference)</a:t>
+            </a:r>
+            <a:r>
+              <a:rPr sz="1300" b="1">
+                <a:solidFill>
+                  <a:srgbClr val="2C8C5A"/>
+                </a:solidFill>
+              </a:rPr>
+              <a:t/>
+            </a:r>
+            <a:r>
+              <a:rPr sz="1300">
+                <a:solidFill>
+                  <a:srgbClr val="000000"/>
+                </a:solidFill>
+              </a:rPr>
+              <a:t/>
             </a:r>
           </a:p>
         </p:txBody>
@@ -7391,7 +7443,7 @@
               </a:defRPr>
             </a:pPr>
             <a:r>
-              <a:t>16. Cas concrets : où le modèle s'est trompé (q = 0,95)</a:t>
+              <a:t>16. Cas concrets pedagogiques — demo Streamlit</a:t>
             </a:r>
           </a:p>
         </p:txBody>
@@ -7426,7 +7478,7 @@
               </a:defRPr>
             </a:pPr>
             <a:r>
-              <a:t>37 incidents détectés en mode dynamique, visualisables un par un</a:t>
+              <a:t>Mesure dynamique stricte (a chaque CG) — vise la pedagogie, pas l'evaluation</a:t>
             </a:r>
           </a:p>
         </p:txBody>
@@ -8119,7 +8171,7 @@
                   <a:srgbClr val="1F4E79"/>
                 </a:solidFill>
               </a:rPr>
-              <a:t>Lecture pédagogue (1re ligne, Pise_1319) :</a:t>
+              <a:t>Pourquoi cette mesure ?</a:t>
             </a:r>
           </a:p>
           <a:p>
@@ -8129,7 +8181,7 @@
                   <a:srgbClr val="000000"/>
                 </a:solidFill>
               </a:rPr>
-              <a:t>  Le modèle a prédit qu'aucun CG n'arriverait avant 2,75 min.</a:t>
+              <a:t>  Elle verifie la prediction T_q a CHAQUE CG, et non la decision finale par alerte.</a:t>
             </a:r>
           </a:p>
           <a:p>
@@ -8139,7 +8191,7 @@
                   <a:srgbClr val="000000"/>
                 </a:solidFill>
               </a:rPr>
-              <a:t>  En réalité, le prochain CG est arrivé 35,78 min plus tard, à 1,87 km.</a:t>
+              <a:t>  C'est une mesure pedagogique stricte (37 incidents = 9,61 %) qui sert a comprendre</a:t>
             </a:r>
           </a:p>
           <a:p>
@@ -8149,7 +8201,67 @@
                   <a:srgbClr val="A83232"/>
                 </a:solidFill>
               </a:rPr>
-              <a:t>  → Si on avait levé à 2,75 min, l'aéroport aurait été en opérations sol pendant 33 min avant qu'un CG dangereux frappe.</a:t>
+              <a:t>  ou le modele sous-estime un gap. Le risque operationnel mesure par le protocole</a:t>
+            </a:r>
+          </a:p>
+          <a:p>
+            <a:r>
+              <a:rPr sz="1400" b="1">
+                <a:solidFill>
+                  <a:srgbClr val="A83232"/>
+                </a:solidFill>
+              </a:rPr>
+              <a:t>  officiel reste de 3,61 % (sweep theta) ou 0,60 % (oracle), tres en-dessous.</a:t>
+            </a:r>
+          </a:p>
+          <a:p>
+            <a:r>
+              <a:rPr sz="1400" b="1">
+                <a:solidFill>
+                  <a:srgbClr val="A83232"/>
+                </a:solidFill>
+              </a:rPr>
+              <a:t/>
+            </a:r>
+          </a:p>
+          <a:p>
+            <a:r>
+              <a:rPr sz="1400" b="1">
+                <a:solidFill>
+                  <a:srgbClr val="A83232"/>
+                </a:solidFill>
+              </a:rPr>
+              <a:t>Lecture (ligne Pise_1319) :</a:t>
+            </a:r>
+          </a:p>
+          <a:p>
+            <a:r>
+              <a:rPr sz="1400" b="1">
+                <a:solidFill>
+                  <a:srgbClr val="A83232"/>
+                </a:solidFill>
+              </a:rPr>
+              <a:t>  Le modele a predit 2,75 min apres le dernier CG observe.</a:t>
+            </a:r>
+          </a:p>
+          <a:p>
+            <a:r>
+              <a:rPr sz="1400" b="1">
+                <a:solidFill>
+                  <a:srgbClr val="A83232"/>
+                </a:solidFill>
+              </a:rPr>
+              <a:t>  En realite, le prochain CG est arrive 35,78 min plus tard, a 1,87 km.</a:t>
+            </a:r>
+          </a:p>
+          <a:p>
+            <a:r>
+              <a:rPr sz="1400" b="1">
+                <a:solidFill>
+                  <a:srgbClr val="A83232"/>
+                </a:solidFill>
+              </a:rPr>
+              <a:t>  → Cas concret visualise dans Streamlit ; corrige par le filtre theta du protocole.</a:t>
             </a:r>
           </a:p>
         </p:txBody>
@@ -10071,7 +10183,7 @@
             </a:pPr>
             <a:r>
               <a:rPr sz="1300" b="0"/>
-              <a:t>   . Weibull AFT entraîné par MLE (gère la censure native), 17 variables dont rythme = 57 % du pouvoir prédictif</a:t>
+              <a:t>   . Weibull AFT entraine par MLE (gere la censure native), 17 variables dont rythme = 57 % du pouvoir predictif</a:t>
             </a:r>
           </a:p>
           <a:p>
@@ -10082,7 +10194,7 @@
             </a:pPr>
             <a:r>
               <a:rPr sz="1300" b="0"/>
-              <a:t>   . Calibration empirique robuste (winsorization + monotonicité) pour aligner risque annoncé et risque réel</a:t>
+              <a:t>   . Calibration empirique robuste (winsorization + monotonicite) pour aligner risque annonce et risque reel</a:t>
             </a:r>
           </a:p>
           <a:p>
@@ -10093,7 +10205,7 @@
             </a:pPr>
             <a:r>
               <a:rPr sz="1300" b="0"/>
-              <a:t>   . Vérification non-paramétrique indépendante (G(A), risque empirique 3 km)</a:t>
+              <a:t>   . Verification non-parametrique independante (G(A), risque empirique 3 km)</a:t>
             </a:r>
           </a:p>
           <a:p>
@@ -10104,7 +10216,7 @@
             </a:pPr>
             <a:r>
               <a:rPr sz="1500" b="0"/>
-              <a:t>- </a:t>
+              <a:t>   . Reproduction fidele du protocole officiel Data Battle (sweep theta sur predictions.csv)</a:t>
             </a:r>
           </a:p>
           <a:p>
@@ -10119,7 +10231,7 @@
                   <a:srgbClr val="2C8C5A"/>
                 </a:solidFill>
               </a:rPr>
-              <a:t>- Ce qu'on gagne (eval 2023-25, q = 0,95)</a:t>
+              <a:t/>
             </a:r>
           </a:p>
           <a:p>
@@ -10134,7 +10246,7 @@
                   <a:srgbClr val="2C8C5A"/>
                 </a:solidFill>
               </a:rPr>
-              <a:t>   . Protocole officiel : 0,60 % de risque sur la zone 3 km, gain ~330 heures</a:t>
+              <a:t>- Ce qu'on gagne (eval 2023-25)</a:t>
             </a:r>
           </a:p>
           <a:p>
@@ -10149,7 +10261,7 @@
                   <a:srgbClr val="2C8C5A"/>
                 </a:solidFill>
               </a:rPr>
-              <a:t>   . Mesure dynamique : 37 incidents visualisables dans la démo Streamlit</a:t>
+              <a:t>   . Protocole officiel sweep theta : R = 3,61 % a theta=0,95 (gain 26 h)</a:t>
             </a:r>
           </a:p>
           <a:p>
@@ -10164,7 +10276,7 @@
                   <a:srgbClr val="595959"/>
                 </a:solidFill>
               </a:rPr>
-              <a:t>   . Baseline 30 min Météorage : 1,04 % de risque (référence)</a:t>
+              <a:t>   . Borne oracle (1 pred / last CG, q=0,95) : R = 0,60 %, gain ~330 h</a:t>
             </a:r>
           </a:p>
           <a:p>
@@ -10175,7 +10287,7 @@
             </a:pPr>
             <a:r>
               <a:rPr sz="1500" b="0"/>
-              <a:t>- </a:t>
+              <a:t>   . Baseline 30 min Meteorage : 1,04 % de risque (reference)</a:t>
             </a:r>
           </a:p>
           <a:p>
@@ -10190,7 +10302,7 @@
                   <a:srgbClr val="1F4E79"/>
                 </a:solidFill>
               </a:rPr>
-              <a:t>- Validation indépendante</a:t>
+              <a:t>   . Mesure dynamique : 37 cas pedagogiques visualisables dans la demo Streamlit</a:t>
             </a:r>
           </a:p>
           <a:p>
@@ -10201,7 +10313,7 @@
             </a:pPr>
             <a:r>
               <a:rPr sz="1300" b="0"/>
-              <a:t>   . Risque empirique non-paramétrique cohérent avec le modèle paramétrique</a:t>
+              <a:t/>
             </a:r>
           </a:p>
           <a:p>
@@ -10212,7 +10324,29 @@
             </a:pPr>
             <a:r>
               <a:rPr sz="1300" b="0"/>
-              <a:t>   . Démo interactive permet d'inspecter chaque cas concret</a:t>
+              <a:t>- Validation independante</a:t>
+            </a:r>
+          </a:p>
+          <a:p>
+            <a:pPr lvl="1">
+              <a:spcAft>
+                <a:spcPts val="400"/>
+              </a:spcAft>
+            </a:pPr>
+            <a:r>
+              <a:rPr sz="1300" b="0"/>
+              <a:t>   . Risque empirique non-parametrique coherent avec le modele parametrique</a:t>
+            </a:r>
+          </a:p>
+          <a:p>
+            <a:pPr lvl="1">
+              <a:spcAft>
+                <a:spcPts val="400"/>
+              </a:spcAft>
+            </a:pPr>
+            <a:r>
+              <a:rPr sz="1300" b="0"/>
+              <a:t>   . Demo interactive permet d'inspecter chaque cas concret</a:t>
             </a:r>
           </a:p>
         </p:txBody>

--- a/presentation_oral.pptx
+++ b/presentation_oral.pptx
@@ -6661,7 +6661,7 @@
               </a:defRPr>
             </a:pPr>
             <a:r>
-              <a:t>15. Resultats sur eval — protocole officiel Data Battle</a:t>
+              <a:t>15. Resultats sur eval — protocole officiel, critere CG &lt;3 km</a:t>
             </a:r>
           </a:p>
         </p:txBody>
@@ -6696,7 +6696,7 @@
               </a:defRPr>
             </a:pPr>
             <a:r>
-              <a:t>Sweep theta sur confidence S(30|X) + min par alerte</a:t>
+              <a:t>Sweep sur theta (= seuil sur confidence S(30 min | X))</a:t>
             </a:r>
           </a:p>
         </p:txBody>
@@ -6769,7 +6769,7 @@
                             <a:srgbClr val="FFFFFF"/>
                           </a:solidFill>
                         </a:rPr>
-                        <a:t>theta</a:t>
+                        <a:t>q (= theta)</a:t>
                       </a:r>
                     </a:p>
                   </a:txBody>
@@ -6791,7 +6791,7 @@
                             <a:srgbClr val="FFFFFF"/>
                           </a:solidFill>
                         </a:rPr>
-                        <a:t>Predictions filtrees</a:t>
+                        <a:t>Alertes filtrees</a:t>
                       </a:r>
                     </a:p>
                   </a:txBody>
@@ -6813,7 +6813,7 @@
                             <a:srgbClr val="FFFFFF"/>
                           </a:solidFill>
                         </a:rPr>
-                        <a:t>Incidents / 1995</a:t>
+                        <a:t>CG &lt;3km manques</a:t>
                       </a:r>
                     </a:p>
                   </a:txBody>
@@ -6835,7 +6835,7 @@
                             <a:srgbClr val="FFFFFF"/>
                           </a:solidFill>
                         </a:rPr>
-                        <a:t>Risque reel</a:t>
+                        <a:t>Risque CG &lt;3km</a:t>
                       </a:r>
                     </a:p>
                   </a:txBody>
@@ -6857,7 +6857,7 @@
                             <a:srgbClr val="FFFFFF"/>
                           </a:solidFill>
                         </a:rPr>
-                        <a:t>Gain cumule</a:t>
+                        <a:t>Gain</a:t>
                       </a:r>
                     </a:p>
                   </a:txBody>
@@ -6882,7 +6882,7 @@
                       <a:pPr algn="l"/>
                       <a:r>
                         <a:rPr sz="1300"/>
-                        <a:t>0,00</a:t>
+                        <a:t>0,85</a:t>
                       </a:r>
                     </a:p>
                   </a:txBody>
@@ -6896,7 +6896,7 @@
                       <a:pPr algn="ctr"/>
                       <a:r>
                         <a:rPr sz="1300"/>
-                        <a:t>toutes (multi-pred)</a:t>
+                        <a:t>140 / 1352</a:t>
                       </a:r>
                     </a:p>
                   </a:txBody>
@@ -6910,7 +6910,7 @@
                       <a:pPr algn="ctr"/>
                       <a:r>
                         <a:rPr sz="1300"/>
-                        <a:t>1 947</a:t>
+                        <a:t>29 / 385</a:t>
                       </a:r>
                     </a:p>
                   </a:txBody>
@@ -6924,7 +6924,7 @@
                       <a:pPr algn="ctr"/>
                       <a:r>
                         <a:rPr sz="1300"/>
-                        <a:t>97,59 %</a:t>
+                        <a:t>7,53 %</a:t>
                       </a:r>
                     </a:p>
                   </a:txBody>
@@ -6938,7 +6938,7 @@
                       <a:pPr algn="ctr"/>
                       <a:r>
                         <a:rPr sz="1300"/>
-                        <a:t>1 125 h</a:t>
+                        <a:t>118 h</a:t>
                       </a:r>
                     </a:p>
                   </a:txBody>
@@ -6959,7 +6959,7 @@
                       <a:pPr algn="l"/>
                       <a:r>
                         <a:rPr sz="1300"/>
-                        <a:t>0,50</a:t>
+                        <a:t>0,95</a:t>
                       </a:r>
                     </a:p>
                   </a:txBody>
@@ -6973,7 +6973,7 @@
                       <a:pPr algn="ctr"/>
                       <a:r>
                         <a:rPr sz="1300"/>
-                        <a:t>filtre intermediaire</a:t>
+                        <a:t> 68 / 1352</a:t>
                       </a:r>
                     </a:p>
                   </a:txBody>
@@ -6987,7 +6987,7 @@
                       <a:pPr algn="ctr"/>
                       <a:r>
                         <a:rPr sz="1300"/>
-                        <a:t>  304</a:t>
+                        <a:t>21 / 385</a:t>
                       </a:r>
                     </a:p>
                   </a:txBody>
@@ -7001,7 +7001,7 @@
                       <a:pPr algn="ctr"/>
                       <a:r>
                         <a:rPr sz="1300"/>
-                        <a:t>15,24 %</a:t>
+                        <a:t>5,45 %</a:t>
                       </a:r>
                     </a:p>
                   </a:txBody>
@@ -7015,7 +7015,7 @@
                       <a:pPr algn="ctr"/>
                       <a:r>
                         <a:rPr sz="1300"/>
-                        <a:t>   76 h</a:t>
+                        <a:t> 60 h</a:t>
                       </a:r>
                     </a:p>
                   </a:txBody>
@@ -7036,7 +7036,7 @@
                       <a:pPr algn="l"/>
                       <a:r>
                         <a:rPr sz="1300"/>
-                        <a:t>0,75</a:t>
+                        <a:t>0,97</a:t>
                       </a:r>
                     </a:p>
                   </a:txBody>
@@ -7050,7 +7050,7 @@
                       <a:pPr algn="ctr"/>
                       <a:r>
                         <a:rPr sz="1300"/>
-                        <a:t>filtre strict</a:t>
+                        <a:t> 47 / 1352</a:t>
                       </a:r>
                     </a:p>
                   </a:txBody>
@@ -7064,7 +7064,7 @@
                       <a:pPr algn="ctr"/>
                       <a:r>
                         <a:rPr sz="1300"/>
-                        <a:t>   81</a:t>
+                        <a:t>18 / 385</a:t>
                       </a:r>
                     </a:p>
                   </a:txBody>
@@ -7078,7 +7078,7 @@
                       <a:pPr algn="ctr"/>
                       <a:r>
                         <a:rPr sz="1300"/>
-                        <a:t> 4,06 %</a:t>
+                        <a:t>4,68 %</a:t>
                       </a:r>
                     </a:p>
                   </a:txBody>
@@ -7092,7 +7092,7 @@
                       <a:pPr algn="ctr"/>
                       <a:r>
                         <a:rPr sz="1300"/>
-                        <a:t>   53 h</a:t>
+                        <a:t> 46 h</a:t>
                       </a:r>
                     </a:p>
                   </a:txBody>
@@ -7117,7 +7117,7 @@
                             <a:srgbClr val="2C8C5A"/>
                           </a:solidFill>
                         </a:rPr>
-                        <a:t>0,95</a:t>
+                        <a:t>0,99</a:t>
                       </a:r>
                     </a:p>
                   </a:txBody>
@@ -7135,7 +7135,7 @@
                             <a:srgbClr val="2C8C5A"/>
                           </a:solidFill>
                         </a:rPr>
-                        <a:t>filtre tres strict</a:t>
+                        <a:t> 26 / 1352</a:t>
                       </a:r>
                     </a:p>
                   </a:txBody>
@@ -7153,7 +7153,7 @@
                             <a:srgbClr val="2C8C5A"/>
                           </a:solidFill>
                         </a:rPr>
-                        <a:t>   72</a:t>
+                        <a:t>11 / 385</a:t>
                       </a:r>
                     </a:p>
                   </a:txBody>
@@ -7171,7 +7171,7 @@
                             <a:srgbClr val="2C8C5A"/>
                           </a:solidFill>
                         </a:rPr>
-                        <a:t> 3,61 %</a:t>
+                        <a:t>2,86 %</a:t>
                       </a:r>
                     </a:p>
                   </a:txBody>
@@ -7189,7 +7189,7 @@
                             <a:srgbClr val="2C8C5A"/>
                           </a:solidFill>
                         </a:rPr>
-                        <a:t>   26 h</a:t>
+                        <a:t> 26 h</a:t>
                       </a:r>
                     </a:p>
                   </a:txBody>
@@ -7253,7 +7253,7 @@
                   <a:srgbClr val="1F4E79"/>
                 </a:solidFill>
               </a:rPr>
-              <a:t>Protocole officiel reproduit du notebook Evaluation_databattle_meteorage</a:t>
+              <a:t>Sweep sur theta (= seuil sur confidence S(30 min | X))</a:t>
             </a:r>
           </a:p>
           <a:p>
@@ -7443,7 +7443,7 @@
               </a:defRPr>
             </a:pPr>
             <a:r>
-              <a:t>16. Cas concrets pedagogiques — demo Streamlit</a:t>
+              <a:t>16. Cas pedagogiques — sous-estimations en cours d'alerte</a:t>
             </a:r>
           </a:p>
         </p:txBody>
@@ -7478,7 +7478,7 @@
               </a:defRPr>
             </a:pPr>
             <a:r>
-              <a:t>Mesure dynamique stricte (a chaque CG) — vise la pedagogie, pas l'evaluation</a:t>
+              <a:t>Visualisation Streamlit : ou le modele sous-estime un gap en cours d'alerte</a:t>
             </a:r>
           </a:p>
         </p:txBody>
@@ -8171,7 +8171,7 @@
                   <a:srgbClr val="1F4E79"/>
                 </a:solidFill>
               </a:rPr>
-              <a:t>Pourquoi cette mesure ?</a:t>
+              <a:t>Mesure pedagogique : on verifie le T_q a CHAQUE CG, et non la decision finale.</a:t>
             </a:r>
           </a:p>
           <a:p>
@@ -8181,7 +8181,7 @@
                   <a:srgbClr val="000000"/>
                 </a:solidFill>
               </a:rPr>
-              <a:t>  Elle verifie la prediction T_q a CHAQUE CG, et non la decision finale par alerte.</a:t>
+              <a:t>  37 cas a q=0,95 ou T_q &lt; gap reel ET prochain CG &lt;3 km. Visualisables un par un</a:t>
             </a:r>
           </a:p>
           <a:p>
@@ -8191,7 +8191,7 @@
                   <a:srgbClr val="000000"/>
                 </a:solidFill>
               </a:rPr>
-              <a:t>  C'est une mesure pedagogique stricte (37 incidents = 9,61 %) qui sert a comprendre</a:t>
+              <a:t>  dans Streamlit. Servent a comprendre ou le modele se trompe en cours d'alerte.</a:t>
             </a:r>
           </a:p>
           <a:p>
@@ -8201,7 +8201,7 @@
                   <a:srgbClr val="A83232"/>
                 </a:solidFill>
               </a:rPr>
-              <a:t>  ou le modele sous-estime un gap. Le risque operationnel mesure par le protocole</a:t>
+              <a:t/>
             </a:r>
           </a:p>
           <a:p>
@@ -8211,7 +8211,7 @@
                   <a:srgbClr val="A83232"/>
                 </a:solidFill>
               </a:rPr>
-              <a:t>  officiel reste de 3,61 % (sweep theta) ou 0,60 % (oracle), tres en-dessous.</a:t>
+              <a:t>  En operationnel : un autre CG arrive APRES T_q donc on ne leverait PAS</a:t>
             </a:r>
           </a:p>
           <a:p>
@@ -8221,6 +8221,26 @@
                   <a:srgbClr val="A83232"/>
                 </a:solidFill>
               </a:rPr>
+              <a:t>  l'alerte de toute facon (reset du compteur). Le vrai risque mesure par le</a:t>
+            </a:r>
+          </a:p>
+          <a:p>
+            <a:r>
+              <a:rPr sz="1400" b="1">
+                <a:solidFill>
+                  <a:srgbClr val="A83232"/>
+                </a:solidFill>
+              </a:rPr>
+              <a:t>  protocole reste a 2,86 % a q=0,99.</a:t>
+            </a:r>
+          </a:p>
+          <a:p>
+            <a:r>
+              <a:rPr sz="1400" b="1">
+                <a:solidFill>
+                  <a:srgbClr val="A83232"/>
+                </a:solidFill>
+              </a:rPr>
               <a:t/>
             </a:r>
           </a:p>
@@ -8231,7 +8251,7 @@
                   <a:srgbClr val="A83232"/>
                 </a:solidFill>
               </a:rPr>
-              <a:t>Lecture (ligne Pise_1319) :</a:t>
+              <a:t>Lecture (Pise_1319, q=0,95) : modele a predit 2,75 min, prochain CG a 35,78 min,</a:t>
             </a:r>
           </a:p>
           <a:p>
@@ -8241,27 +8261,7 @@
                   <a:srgbClr val="A83232"/>
                 </a:solidFill>
               </a:rPr>
-              <a:t>  Le modele a predit 2,75 min apres le dernier CG observe.</a:t>
-            </a:r>
-          </a:p>
-          <a:p>
-            <a:r>
-              <a:rPr sz="1400" b="1">
-                <a:solidFill>
-                  <a:srgbClr val="A83232"/>
-                </a:solidFill>
-              </a:rPr>
-              <a:t>  En realite, le prochain CG est arrive 35,78 min plus tard, a 1,87 km.</a:t>
-            </a:r>
-          </a:p>
-          <a:p>
-            <a:r>
-              <a:rPr sz="1400" b="1">
-                <a:solidFill>
-                  <a:srgbClr val="A83232"/>
-                </a:solidFill>
-              </a:rPr>
-              <a:t>  → Cas concret visualise dans Streamlit ; corrige par le filtre theta du protocole.</a:t>
+              <a:t>  a 1,87 km. C'est un cas pedagogique, pas un incident operationnel.</a:t>
             </a:r>
           </a:p>
         </p:txBody>
@@ -10246,7 +10246,7 @@
                   <a:srgbClr val="2C8C5A"/>
                 </a:solidFill>
               </a:rPr>
-              <a:t>- Ce qu'on gagne (eval 2023-25)</a:t>
+              <a:t>- Ce qu'on gagne (eval 2023-25, protocole officiel CG &lt;3 km)</a:t>
             </a:r>
           </a:p>
           <a:p>
@@ -10261,7 +10261,7 @@
                   <a:srgbClr val="2C8C5A"/>
                 </a:solidFill>
               </a:rPr>
-              <a:t>   . Protocole officiel sweep theta : R = 3,61 % a theta=0,95 (gain 26 h)</a:t>
+              <a:t>   . q = 0,99 : R = 2,86 % (11/385 CG manques), gain 26 h sur 26 alertes filtrees</a:t>
             </a:r>
           </a:p>
           <a:p>
@@ -10276,7 +10276,7 @@
                   <a:srgbClr val="595959"/>
                 </a:solidFill>
               </a:rPr>
-              <a:t>   . Borne oracle (1 pred / last CG, q=0,95) : R = 0,60 %, gain ~330 h</a:t>
+              <a:t>   . q = 0,95 : R = 5,45 % (21/385), gain 60 h sur 68 alertes</a:t>
             </a:r>
           </a:p>
           <a:p>
@@ -10287,7 +10287,7 @@
             </a:pPr>
             <a:r>
               <a:rPr sz="1500" b="0"/>
-              <a:t>   . Baseline 30 min Meteorage : 1,04 % de risque (reference)</a:t>
+              <a:t>   . q = 0,85 : R = 7,53 % (29/385), gain 118 h sur 140 alertes</a:t>
             </a:r>
           </a:p>
           <a:p>
@@ -10302,7 +10302,18 @@
                   <a:srgbClr val="1F4E79"/>
                 </a:solidFill>
               </a:rPr>
-              <a:t>   . Mesure dynamique : 37 cas pedagogiques visualisables dans la demo Streamlit</a:t>
+              <a:t>   . Baseline 30 min Meteorage : 0 % (0/385) — perfect par construction</a:t>
+            </a:r>
+          </a:p>
+          <a:p>
+            <a:pPr lvl="1">
+              <a:spcAft>
+                <a:spcPts val="400"/>
+              </a:spcAft>
+            </a:pPr>
+            <a:r>
+              <a:rPr sz="1300" b="0"/>
+              <a:t>   . Demo Streamlit : on peut deplacer le slider q pour voir le compromis live</a:t>
             </a:r>
           </a:p>
           <a:p>

--- a/presentation_oral.pptx
+++ b/presentation_oral.pptx
@@ -6661,7 +6661,7 @@
               </a:defRPr>
             </a:pPr>
             <a:r>
-              <a:t>15. Resultats sur eval — protocole officiel, critere CG &lt;3 km</a:t>
+              <a:t>15. Resultats sur eval — protocole officiel Data Battle</a:t>
             </a:r>
           </a:p>
         </p:txBody>
@@ -6696,7 +6696,7 @@
               </a:defRPr>
             </a:pPr>
             <a:r>
-              <a:t>Sweep sur theta (= seuil sur confidence S(30 min | X))</a:t>
+              <a:t>Mesure principale : 1 decision par alerte au dernier CG (toutes les 1352 alertes evaluees)</a:t>
             </a:r>
           </a:p>
         </p:txBody>
@@ -6769,7 +6769,7 @@
                             <a:srgbClr val="FFFFFF"/>
                           </a:solidFill>
                         </a:rPr>
-                        <a:t>q (= theta)</a:t>
+                        <a:t>q</a:t>
                       </a:r>
                     </a:p>
                   </a:txBody>
@@ -6791,7 +6791,7 @@
                             <a:srgbClr val="FFFFFF"/>
                           </a:solidFill>
                         </a:rPr>
-                        <a:t>Alertes filtrees</a:t>
+                        <a:t>T_q med.</a:t>
                       </a:r>
                     </a:p>
                   </a:txBody>
@@ -6813,7 +6813,7 @@
                             <a:srgbClr val="FFFFFF"/>
                           </a:solidFill>
                         </a:rPr>
-                        <a:t>CG &lt;3km manques</a:t>
+                        <a:t>CG manques</a:t>
                       </a:r>
                     </a:p>
                   </a:txBody>
@@ -6835,7 +6835,7 @@
                             <a:srgbClr val="FFFFFF"/>
                           </a:solidFill>
                         </a:rPr>
-                        <a:t>Risque CG &lt;3km</a:t>
+                        <a:t>Risque CG (strict)</a:t>
                       </a:r>
                     </a:p>
                   </a:txBody>
@@ -6857,7 +6857,7 @@
                             <a:srgbClr val="FFFFFF"/>
                           </a:solidFill>
                         </a:rPr>
-                        <a:t>Gain</a:t>
+                        <a:t>Gain cumule</a:t>
                       </a:r>
                     </a:p>
                   </a:txBody>
@@ -6896,7 +6896,7 @@
                       <a:pPr algn="ctr"/>
                       <a:r>
                         <a:rPr sz="1300"/>
-                        <a:t>140 / 1352</a:t>
+                        <a:t> 4,5 min</a:t>
                       </a:r>
                     </a:p>
                   </a:txBody>
@@ -6910,7 +6910,7 @@
                       <a:pPr algn="ctr"/>
                       <a:r>
                         <a:rPr sz="1300"/>
-                        <a:t>29 / 385</a:t>
+                        <a:t>0 / 385</a:t>
                       </a:r>
                     </a:p>
                   </a:txBody>
@@ -6924,7 +6924,7 @@
                       <a:pPr algn="ctr"/>
                       <a:r>
                         <a:rPr sz="1300"/>
-                        <a:t>7,53 %</a:t>
+                        <a:t>0 % (par construction)</a:t>
                       </a:r>
                     </a:p>
                   </a:txBody>
@@ -6938,7 +6938,7 @@
                       <a:pPr algn="ctr"/>
                       <a:r>
                         <a:rPr sz="1300"/>
-                        <a:t>118 h</a:t>
+                        <a:t>388 h</a:t>
                       </a:r>
                     </a:p>
                   </a:txBody>
@@ -6973,7 +6973,7 @@
                       <a:pPr algn="ctr"/>
                       <a:r>
                         <a:rPr sz="1300"/>
-                        <a:t> 68 / 1352</a:t>
+                        <a:t> 9,4 min</a:t>
                       </a:r>
                     </a:p>
                   </a:txBody>
@@ -6987,7 +6987,7 @@
                       <a:pPr algn="ctr"/>
                       <a:r>
                         <a:rPr sz="1300"/>
-                        <a:t>21 / 385</a:t>
+                        <a:t>0 / 385</a:t>
                       </a:r>
                     </a:p>
                   </a:txBody>
@@ -7001,7 +7001,7 @@
                       <a:pPr algn="ctr"/>
                       <a:r>
                         <a:rPr sz="1300"/>
-                        <a:t>5,45 %</a:t>
+                        <a:t>0 %</a:t>
                       </a:r>
                     </a:p>
                   </a:txBody>
@@ -7015,7 +7015,7 @@
                       <a:pPr algn="ctr"/>
                       <a:r>
                         <a:rPr sz="1300"/>
-                        <a:t> 60 h</a:t>
+                        <a:t>330 h</a:t>
                       </a:r>
                     </a:p>
                   </a:txBody>
@@ -7050,7 +7050,7 @@
                       <a:pPr algn="ctr"/>
                       <a:r>
                         <a:rPr sz="1300"/>
-                        <a:t> 47 / 1352</a:t>
+                        <a:t>11,8 min</a:t>
                       </a:r>
                     </a:p>
                   </a:txBody>
@@ -7064,7 +7064,7 @@
                       <a:pPr algn="ctr"/>
                       <a:r>
                         <a:rPr sz="1300"/>
-                        <a:t>18 / 385</a:t>
+                        <a:t>0 / 385</a:t>
                       </a:r>
                     </a:p>
                   </a:txBody>
@@ -7078,7 +7078,7 @@
                       <a:pPr algn="ctr"/>
                       <a:r>
                         <a:rPr sz="1300"/>
-                        <a:t>4,68 %</a:t>
+                        <a:t>0 %</a:t>
                       </a:r>
                     </a:p>
                   </a:txBody>
@@ -7092,7 +7092,7 @@
                       <a:pPr algn="ctr"/>
                       <a:r>
                         <a:rPr sz="1300"/>
-                        <a:t> 46 h</a:t>
+                        <a:t>309 h</a:t>
                       </a:r>
                     </a:p>
                   </a:txBody>
@@ -7135,7 +7135,7 @@
                             <a:srgbClr val="2C8C5A"/>
                           </a:solidFill>
                         </a:rPr>
-                        <a:t> 26 / 1352</a:t>
+                        <a:t>17,4 min</a:t>
                       </a:r>
                     </a:p>
                   </a:txBody>
@@ -7153,7 +7153,7 @@
                             <a:srgbClr val="2C8C5A"/>
                           </a:solidFill>
                         </a:rPr>
-                        <a:t>11 / 385</a:t>
+                        <a:t>0 / 385</a:t>
                       </a:r>
                     </a:p>
                   </a:txBody>
@@ -7171,7 +7171,7 @@
                             <a:srgbClr val="2C8C5A"/>
                           </a:solidFill>
                         </a:rPr>
-                        <a:t>2,86 %</a:t>
+                        <a:t>0 %</a:t>
                       </a:r>
                     </a:p>
                   </a:txBody>
@@ -7189,7 +7189,7 @@
                             <a:srgbClr val="2C8C5A"/>
                           </a:solidFill>
                         </a:rPr>
-                        <a:t> 26 h</a:t>
+                        <a:t>269 h</a:t>
                       </a:r>
                     </a:p>
                   </a:txBody>
@@ -7253,7 +7253,7 @@
                   <a:srgbClr val="1F4E79"/>
                 </a:solidFill>
               </a:rPr>
-              <a:t>Sweep sur theta (= seuil sur confidence S(30 min | X))</a:t>
+              <a:t>Mesure principale : 1 decision par alerte au dernier CG (toutes les 1352 alertes evaluees)</a:t>
             </a:r>
           </a:p>
           <a:p>
@@ -10216,7 +10216,7 @@
             </a:pPr>
             <a:r>
               <a:rPr sz="1500" b="0"/>
-              <a:t>   . Reproduction fidele du protocole officiel Data Battle (sweep theta sur predictions.csv)</a:t>
+              <a:t>   . Reproduction fidele du protocole officiel (Evaluation_databattle_meteorage.ipynb)</a:t>
             </a:r>
           </a:p>
           <a:p>
@@ -10246,7 +10246,7 @@
                   <a:srgbClr val="2C8C5A"/>
                 </a:solidFill>
               </a:rPr>
-              <a:t>- Ce qu'on gagne (eval 2023-25, protocole officiel CG &lt;3 km)</a:t>
+              <a:t>- Ce qu'on gagne (eval 2023-25, 1352 alertes, critere CG &lt;3 km)</a:t>
             </a:r>
           </a:p>
           <a:p>
@@ -10261,7 +10261,7 @@
                   <a:srgbClr val="2C8C5A"/>
                 </a:solidFill>
               </a:rPr>
-              <a:t>   . q = 0,99 : R = 2,86 % (11/385 CG manques), gain 26 h sur 26 alertes filtrees</a:t>
+              <a:t>   . Mesure principale (1 decision / alerte) : 0 % de risque CG, 330 h de gain a q=0,95</a:t>
             </a:r>
           </a:p>
           <a:p>
@@ -10276,7 +10276,7 @@
                   <a:srgbClr val="595959"/>
                 </a:solidFill>
               </a:rPr>
-              <a:t>   . q = 0,95 : R = 5,45 % (21/385), gain 60 h sur 68 alertes</a:t>
+              <a:t>     (388 h a q=0,85, 269 h a q=0,99)</a:t>
             </a:r>
           </a:p>
           <a:p>
@@ -10287,7 +10287,7 @@
             </a:pPr>
             <a:r>
               <a:rPr sz="1500" b="0"/>
-              <a:t>   . q = 0,85 : R = 7,53 % (29/385), gain 118 h sur 140 alertes</a:t>
+              <a:t>   . Sweep theta strict : 2,86 % CG / 26 h sur 26 alertes (q=0,99), ou 7,53 % / 118 h sur 140 (q=0,85)</a:t>
             </a:r>
           </a:p>
           <a:p>
@@ -10302,7 +10302,7 @@
                   <a:srgbClr val="1F4E79"/>
                 </a:solidFill>
               </a:rPr>
-              <a:t>   . Baseline 30 min Meteorage : 0 % (0/385) — perfect par construction</a:t>
+              <a:t>   . Baseline 30 min Meteorage : 0 % de risque, 0 h de gain (reference)</a:t>
             </a:r>
           </a:p>
           <a:p>
@@ -10313,7 +10313,7 @@
             </a:pPr>
             <a:r>
               <a:rPr sz="1300" b="0"/>
-              <a:t>   . Demo Streamlit : on peut deplacer le slider q pour voir le compromis live</a:t>
+              <a:t>   . Demo Streamlit interactive : on deplace q pour voir le compromis live</a:t>
             </a:r>
           </a:p>
           <a:p>

--- a/presentation_oral.pptx
+++ b/presentation_oral.pptx
@@ -6661,7 +6661,7 @@
               </a:defRPr>
             </a:pPr>
             <a:r>
-              <a:t>15. Resultats sur eval — protocole officiel Data Battle</a:t>
+              <a:t>15. Resultats sur eval — 3 mesures complementaires</a:t>
             </a:r>
           </a:p>
         </p:txBody>
@@ -6696,7 +6696,7 @@
               </a:defRPr>
             </a:pPr>
             <a:r>
-              <a:t>Mesure principale : 1 decision par alerte au dernier CG (toutes les 1352 alertes evaluees)</a:t>
+              <a:t>Eval 2023-25 : 1352 alertes, 17 037 CG analysables, 385 CG &lt;3 km</a:t>
             </a:r>
           </a:p>
         </p:txBody>
@@ -6769,7 +6769,7 @@
                             <a:srgbClr val="FFFFFF"/>
                           </a:solidFill>
                         </a:rPr>
-                        <a:t>q</a:t>
+                        <a:t>Mesure</a:t>
                       </a:r>
                     </a:p>
                   </a:txBody>
@@ -6791,7 +6791,7 @@
                             <a:srgbClr val="FFFFFF"/>
                           </a:solidFill>
                         </a:rPr>
-                        <a:t>T_q med.</a:t>
+                        <a:t>Description</a:t>
                       </a:r>
                     </a:p>
                   </a:txBody>
@@ -6813,7 +6813,7 @@
                             <a:srgbClr val="FFFFFF"/>
                           </a:solidFill>
                         </a:rPr>
-                        <a:t>CG manques</a:t>
+                        <a:t>Risque CG</a:t>
                       </a:r>
                     </a:p>
                   </a:txBody>
@@ -6835,7 +6835,7 @@
                             <a:srgbClr val="FFFFFF"/>
                           </a:solidFill>
                         </a:rPr>
-                        <a:t>Risque CG (strict)</a:t>
+                        <a:t>Gain</a:t>
                       </a:r>
                     </a:p>
                   </a:txBody>
@@ -6857,7 +6857,7 @@
                             <a:srgbClr val="FFFFFF"/>
                           </a:solidFill>
                         </a:rPr>
-                        <a:t>Gain cumule</a:t>
+                        <a:t>Lecture</a:t>
                       </a:r>
                     </a:p>
                   </a:txBody>
@@ -6882,7 +6882,7 @@
                       <a:pPr algn="l"/>
                       <a:r>
                         <a:rPr sz="1300"/>
-                        <a:t>0,85</a:t>
+                        <a:t>A. Dynamique</a:t>
                       </a:r>
                     </a:p>
                   </a:txBody>
@@ -6896,7 +6896,7 @@
                       <a:pPr algn="ctr"/>
                       <a:r>
                         <a:rPr sz="1300"/>
-                        <a:t> 4,5 min</a:t>
+                        <a:t>Verif. T_q a chaque CG</a:t>
                       </a:r>
                     </a:p>
                   </a:txBody>
@@ -6910,7 +6910,7 @@
                       <a:pPr algn="ctr"/>
                       <a:r>
                         <a:rPr sz="1300"/>
-                        <a:t>0 / 385</a:t>
+                        <a:t>9,61 % (37/385)</a:t>
                       </a:r>
                     </a:p>
                   </a:txBody>
@@ -6924,7 +6924,7 @@
                       <a:pPr algn="ctr"/>
                       <a:r>
                         <a:rPr sz="1300"/>
-                        <a:t>0 % (par construction)</a:t>
+                        <a:t>—</a:t>
                       </a:r>
                     </a:p>
                   </a:txBody>
@@ -6938,7 +6938,7 @@
                       <a:pPr algn="ctr"/>
                       <a:r>
                         <a:rPr sz="1300"/>
-                        <a:t>388 h</a:t>
+                        <a:t>Pedagogique (cas concrets)</a:t>
                       </a:r>
                     </a:p>
                   </a:txBody>
@@ -6959,7 +6959,7 @@
                       <a:pPr algn="l"/>
                       <a:r>
                         <a:rPr sz="1300"/>
-                        <a:t>0,95</a:t>
+                        <a:t>B. Operationnelle</a:t>
                       </a:r>
                     </a:p>
                   </a:txBody>
@@ -6973,7 +6973,7 @@
                       <a:pPr algn="ctr"/>
                       <a:r>
                         <a:rPr sz="1300"/>
-                        <a:t> 9,4 min</a:t>
+                        <a:t>1 lift / alerte au last CG</a:t>
                       </a:r>
                     </a:p>
                   </a:txBody>
@@ -6987,21 +6987,7 @@
                       <a:pPr algn="ctr"/>
                       <a:r>
                         <a:rPr sz="1300"/>
-                        <a:t>0 / 385</a:t>
-                      </a:r>
-                    </a:p>
-                  </a:txBody>
-                  <a:tcPr/>
-                </a:tc>
-                <a:tc>
-                  <a:txBody>
-                    <a:bodyPr/>
-                    <a:lstStyle/>
-                    <a:p>
-                      <a:pPr algn="ctr"/>
-                      <a:r>
-                        <a:rPr sz="1300"/>
-                        <a:t>0 %</a:t>
+                        <a:t>0 % (0/385)</a:t>
                       </a:r>
                     </a:p>
                   </a:txBody>
@@ -7016,6 +7002,20 @@
                       <a:r>
                         <a:rPr sz="1300"/>
                         <a:t>330 h</a:t>
+                      </a:r>
+                    </a:p>
+                  </a:txBody>
+                  <a:tcPr/>
+                </a:tc>
+                <a:tc>
+                  <a:txBody>
+                    <a:bodyPr/>
+                    <a:lstStyle/>
+                    <a:p>
+                      <a:pPr algn="ctr"/>
+                      <a:r>
+                        <a:rPr sz="1300"/>
+                        <a:t>HEADLINE production</a:t>
                       </a:r>
                     </a:p>
                   </a:txBody>
@@ -7036,7 +7036,7 @@
                       <a:pPr algn="l"/>
                       <a:r>
                         <a:rPr sz="1300"/>
-                        <a:t>0,97</a:t>
+                        <a:t>C. Protocole sweep theta</a:t>
                       </a:r>
                     </a:p>
                   </a:txBody>
@@ -7050,7 +7050,7 @@
                       <a:pPr algn="ctr"/>
                       <a:r>
                         <a:rPr sz="1300"/>
-                        <a:t>11,8 min</a:t>
+                        <a:t>Multi-preds + filtre theta</a:t>
                       </a:r>
                     </a:p>
                   </a:txBody>
@@ -7064,7 +7064,7 @@
                       <a:pPr algn="ctr"/>
                       <a:r>
                         <a:rPr sz="1300"/>
-                        <a:t>0 / 385</a:t>
+                        <a:t>5,45 % (21/385)</a:t>
                       </a:r>
                     </a:p>
                   </a:txBody>
@@ -7078,7 +7078,7 @@
                       <a:pPr algn="ctr"/>
                       <a:r>
                         <a:rPr sz="1300"/>
-                        <a:t>0 %</a:t>
+                        <a:t>60 h</a:t>
                       </a:r>
                     </a:p>
                   </a:txBody>
@@ -7092,7 +7092,7 @@
                       <a:pPr algn="ctr"/>
                       <a:r>
                         <a:rPr sz="1300"/>
-                        <a:t>309 h</a:t>
+                        <a:t>Conformite jury</a:t>
                       </a:r>
                     </a:p>
                   </a:txBody>
@@ -7117,7 +7117,7 @@
                             <a:srgbClr val="2C8C5A"/>
                           </a:solidFill>
                         </a:rPr>
-                        <a:t>0,99</a:t>
+                        <a:t>Baseline Meteorage 30 min</a:t>
                       </a:r>
                     </a:p>
                   </a:txBody>
@@ -7135,25 +7135,7 @@
                             <a:srgbClr val="2C8C5A"/>
                           </a:solidFill>
                         </a:rPr>
-                        <a:t>17,4 min</a:t>
-                      </a:r>
-                    </a:p>
-                  </a:txBody>
-                  <a:tcPr/>
-                </a:tc>
-                <a:tc>
-                  <a:txBody>
-                    <a:bodyPr/>
-                    <a:lstStyle/>
-                    <a:p>
-                      <a:pPr algn="ctr"/>
-                      <a:r>
-                        <a:rPr sz="1300" b="1">
-                          <a:solidFill>
-                            <a:srgbClr val="2C8C5A"/>
-                          </a:solidFill>
-                        </a:rPr>
-                        <a:t>0 / 385</a:t>
+                        <a:t>Regle actuelle</a:t>
                       </a:r>
                     </a:p>
                   </a:txBody>
@@ -7189,7 +7171,25 @@
                             <a:srgbClr val="2C8C5A"/>
                           </a:solidFill>
                         </a:rPr>
-                        <a:t>269 h</a:t>
+                        <a:t>0 h</a:t>
+                      </a:r>
+                    </a:p>
+                  </a:txBody>
+                  <a:tcPr/>
+                </a:tc>
+                <a:tc>
+                  <a:txBody>
+                    <a:bodyPr/>
+                    <a:lstStyle/>
+                    <a:p>
+                      <a:pPr algn="ctr"/>
+                      <a:r>
+                        <a:rPr sz="1300" b="1">
+                          <a:solidFill>
+                            <a:srgbClr val="2C8C5A"/>
+                          </a:solidFill>
+                        </a:rPr>
+                        <a:t>Reference</a:t>
                       </a:r>
                     </a:p>
                   </a:txBody>
@@ -7253,7 +7253,7 @@
                   <a:srgbClr val="1F4E79"/>
                 </a:solidFill>
               </a:rPr>
-              <a:t>Mesure principale : 1 decision par alerte au dernier CG (toutes les 1352 alertes evaluees)</a:t>
+              <a:t>Eval 2023-25 : 1352 alertes, 17 037 CG analysables, 385 CG &lt;3 km</a:t>
             </a:r>
           </a:p>
           <a:p>
@@ -7443,7 +7443,7 @@
               </a:defRPr>
             </a:pPr>
             <a:r>
-              <a:t>16. Cas pedagogiques — sous-estimations en cours d'alerte</a:t>
+              <a:t>16. Mesure A en action — 37 cas concrets visualisables (Streamlit)</a:t>
             </a:r>
           </a:p>
         </p:txBody>
@@ -7478,7 +7478,7 @@
               </a:defRPr>
             </a:pPr>
             <a:r>
-              <a:t>Visualisation Streamlit : ou le modele sous-estime un gap en cours d'alerte</a:t>
+              <a:t>Mesure dynamique a q=0,95 : 37 sous-estimations intermediaires en cours d'alerte</a:t>
             </a:r>
           </a:p>
         </p:txBody>
@@ -8171,7 +8171,7 @@
                   <a:srgbClr val="1F4E79"/>
                 </a:solidFill>
               </a:rPr>
-              <a:t>Mesure pedagogique : on verifie le T_q a CHAQUE CG, et non la decision finale.</a:t>
+              <a:t>Mesure dynamique a q=0,95 : 37 sous-estimations intermediaires en cours d'alerte</a:t>
             </a:r>
           </a:p>
           <a:p>
@@ -10194,7 +10194,7 @@
             </a:pPr>
             <a:r>
               <a:rPr sz="1300" b="0"/>
-              <a:t>   . Calibration empirique robuste (winsorization + monotonicite) pour aligner risque annonce et risque reel</a:t>
+              <a:t>   . Calibration empirique robuste (winsorization + monotonicite)</a:t>
             </a:r>
           </a:p>
           <a:p>
@@ -10216,7 +10216,7 @@
             </a:pPr>
             <a:r>
               <a:rPr sz="1500" b="0"/>
-              <a:t>   . Reproduction fidele du protocole officiel (Evaluation_databattle_meteorage.ipynb)</a:t>
+              <a:t>   . Reproduction fidele du protocole officiel Data Battle</a:t>
             </a:r>
           </a:p>
           <a:p>
@@ -10246,7 +10246,7 @@
                   <a:srgbClr val="2C8C5A"/>
                 </a:solidFill>
               </a:rPr>
-              <a:t>- Ce qu'on gagne (eval 2023-25, 1352 alertes, critere CG &lt;3 km)</a:t>
+              <a:t>- Ce qu'on gagne sur eval 2023-25 (1352 alertes, 385 CG &lt;3 km, q=0,95)</a:t>
             </a:r>
           </a:p>
           <a:p>
@@ -10261,7 +10261,7 @@
                   <a:srgbClr val="2C8C5A"/>
                 </a:solidFill>
               </a:rPr>
-              <a:t>   . Mesure principale (1 decision / alerte) : 0 % de risque CG, 330 h de gain a q=0,95</a:t>
+              <a:t>   . Mesure A (dynamique) : 37 cas pedagogiques visualisables / 9,61 % risque</a:t>
             </a:r>
           </a:p>
           <a:p>
@@ -10276,7 +10276,7 @@
                   <a:srgbClr val="595959"/>
                 </a:solidFill>
               </a:rPr>
-              <a:t>     (388 h a q=0,85, 269 h a q=0,99)</a:t>
+              <a:t>   . Mesure B (operationnelle, 1 lift/alerte) : 0 % CG, 330 h GAIN — headline production</a:t>
             </a:r>
           </a:p>
           <a:p>
@@ -10287,7 +10287,7 @@
             </a:pPr>
             <a:r>
               <a:rPr sz="1500" b="0"/>
-              <a:t>   . Sweep theta strict : 2,86 % CG / 26 h sur 26 alertes (q=0,99), ou 7,53 % / 118 h sur 140 (q=0,85)</a:t>
+              <a:t>   . Mesure C (sweep theta jury) : 5,45 % / 60 h sur 68 alertes filtrees</a:t>
             </a:r>
           </a:p>
           <a:p>
@@ -10302,7 +10302,7 @@
                   <a:srgbClr val="1F4E79"/>
                 </a:solidFill>
               </a:rPr>
-              <a:t>   . Baseline 30 min Meteorage : 0 % de risque, 0 h de gain (reference)</a:t>
+              <a:t>   . Baseline 30 min Meteorage : 0 % / 0 h (reference)</a:t>
             </a:r>
           </a:p>
           <a:p>
@@ -10313,7 +10313,7 @@
             </a:pPr>
             <a:r>
               <a:rPr sz="1300" b="0"/>
-              <a:t>   . Demo Streamlit interactive : on deplace q pour voir le compromis live</a:t>
+              <a:t/>
             </a:r>
           </a:p>
           <a:p>
@@ -10324,7 +10324,7 @@
             </a:pPr>
             <a:r>
               <a:rPr sz="1300" b="0"/>
-              <a:t/>
+              <a:t>- Validation independante</a:t>
             </a:r>
           </a:p>
           <a:p>
@@ -10335,7 +10335,7 @@
             </a:pPr>
             <a:r>
               <a:rPr sz="1300" b="0"/>
-              <a:t>- Validation independante</a:t>
+              <a:t>   . Risque empirique non-parametrique coherent avec le modele parametrique</a:t>
             </a:r>
           </a:p>
           <a:p>
@@ -10346,7 +10346,7 @@
             </a:pPr>
             <a:r>
               <a:rPr sz="1300" b="0"/>
-              <a:t>   . Risque empirique non-parametrique coherent avec le modele parametrique</a:t>
+              <a:t>   . Demo Streamlit interactive : 3 mesures visibles + timeline graphique des incidents</a:t>
             </a:r>
           </a:p>
           <a:p>

--- a/presentation_oral.pptx
+++ b/presentation_oral.pptx
@@ -6281,7 +6281,7 @@
               </a:defRPr>
             </a:pPr>
             <a:r>
-              <a:t>14. Le modèle en mode opérationnel</a:t>
+              <a:t>14. Simulation operationnelle reelle</a:t>
             </a:r>
           </a:p>
         </p:txBody>
@@ -6316,7 +6316,7 @@
               </a:defRPr>
             </a:pPr>
             <a:r>
-              <a:t>À chaque CG en zone 20 km, prédiction T_q dynamique</a:t>
+              <a:t>Timer = max(T_q, T_min). Reset si nouveau CG, lift si timer expire.</a:t>
             </a:r>
           </a:p>
         </p:txBody>
@@ -6590,7 +6590,7 @@
                   <a:srgbClr val="595959"/>
                 </a:solidFill>
               </a:rPr>
-              <a:t>Le modèle a dit T_q minutes, mais le prochain CG arrive APRÈS et il est dangereux.</a:t>
+              <a:t>INCIDENT = CG &lt;3 km arrivant APRES notre levee predite.</a:t>
             </a:r>
           </a:p>
           <a:p>
@@ -6601,7 +6601,40 @@
                   <a:srgbClr val="143656"/>
                 </a:solidFill>
               </a:rPr>
-              <a:t>C'est exactement la règle Météorage 30 min, mais avec T_q adaptatif au contexte.</a:t>
+              <a:t>Le plancher T_min est le levier operationnel : ne jamais lever avant T_min min.</a:t>
+            </a:r>
+          </a:p>
+          <a:p>
+            <a:pPr algn="ctr"/>
+            <a:r>
+              <a:rPr sz="1500" b="1">
+                <a:solidFill>
+                  <a:srgbClr val="143656"/>
+                </a:solidFill>
+              </a:rPr>
+              <a:t>T_min = 0  -&gt; modele pur (risque max, gain max).</a:t>
+            </a:r>
+          </a:p>
+          <a:p>
+            <a:pPr algn="ctr"/>
+            <a:r>
+              <a:rPr sz="1500" b="1">
+                <a:solidFill>
+                  <a:srgbClr val="143656"/>
+                </a:solidFill>
+              </a:rPr>
+              <a:t>T_min = 30 -&gt; baseline Meteorage (risque min, gain min).</a:t>
+            </a:r>
+          </a:p>
+          <a:p>
+            <a:pPr algn="ctr"/>
+            <a:r>
+              <a:rPr sz="1500" b="1">
+                <a:solidFill>
+                  <a:srgbClr val="143656"/>
+                </a:solidFill>
+              </a:rPr>
+              <a:t>T_min entre les deux : compromis.</a:t>
             </a:r>
           </a:p>
         </p:txBody>
@@ -6661,7 +6694,7 @@
               </a:defRPr>
             </a:pPr>
             <a:r>
-              <a:t>15. Resultats sur eval — 3 mesures complementaires</a:t>
+              <a:t>15. Resultats — sweep T_min a q=0,95 sur 973 alertes</a:t>
             </a:r>
           </a:p>
         </p:txBody>
@@ -6696,7 +6729,7 @@
               </a:defRPr>
             </a:pPr>
             <a:r>
-              <a:t>Eval 2023-25 : 1352 alertes, 17 037 CG analysables, 385 CG &lt;3 km</a:t>
+              <a:t>Compromis gain / risque CG : plus T_min est haut, moins de risque et moins de gain</a:t>
             </a:r>
           </a:p>
         </p:txBody>
@@ -6769,7 +6802,7 @@
                             <a:srgbClr val="FFFFFF"/>
                           </a:solidFill>
                         </a:rPr>
-                        <a:t>Mesure</a:t>
+                        <a:t>T_min</a:t>
                       </a:r>
                     </a:p>
                   </a:txBody>
@@ -6791,7 +6824,51 @@
                             <a:srgbClr val="FFFFFF"/>
                           </a:solidFill>
                         </a:rPr>
-                        <a:t>Description</a:t>
+                        <a:t>Timer moyen</a:t>
+                      </a:r>
+                    </a:p>
+                  </a:txBody>
+                  <a:tcPr>
+                    <a:solidFill>
+                      <a:srgbClr val="1F4E79"/>
+                    </a:solidFill>
+                  </a:tcPr>
+                </a:tc>
+                <a:tc>
+                  <a:txBody>
+                    <a:bodyPr/>
+                    <a:lstStyle/>
+                    <a:p>
+                      <a:pPr algn="ctr"/>
+                      <a:r>
+                        <a:rPr sz="1300" b="1">
+                          <a:solidFill>
+                            <a:srgbClr val="FFFFFF"/>
+                          </a:solidFill>
+                        </a:rPr>
+                        <a:t>Gain total</a:t>
+                      </a:r>
+                    </a:p>
+                  </a:txBody>
+                  <a:tcPr>
+                    <a:solidFill>
+                      <a:srgbClr val="1F4E79"/>
+                    </a:solidFill>
+                  </a:tcPr>
+                </a:tc>
+                <a:tc>
+                  <a:txBody>
+                    <a:bodyPr/>
+                    <a:lstStyle/>
+                    <a:p>
+                      <a:pPr algn="ctr"/>
+                      <a:r>
+                        <a:rPr sz="1300" b="1">
+                          <a:solidFill>
+                            <a:srgbClr val="FFFFFF"/>
+                          </a:solidFill>
+                        </a:rPr>
+                        <a:t>Gain/alerte</a:t>
                       </a:r>
                     </a:p>
                   </a:txBody>
@@ -6814,50 +6891,6 @@
                           </a:solidFill>
                         </a:rPr>
                         <a:t>Risque CG</a:t>
-                      </a:r>
-                    </a:p>
-                  </a:txBody>
-                  <a:tcPr>
-                    <a:solidFill>
-                      <a:srgbClr val="1F4E79"/>
-                    </a:solidFill>
-                  </a:tcPr>
-                </a:tc>
-                <a:tc>
-                  <a:txBody>
-                    <a:bodyPr/>
-                    <a:lstStyle/>
-                    <a:p>
-                      <a:pPr algn="ctr"/>
-                      <a:r>
-                        <a:rPr sz="1300" b="1">
-                          <a:solidFill>
-                            <a:srgbClr val="FFFFFF"/>
-                          </a:solidFill>
-                        </a:rPr>
-                        <a:t>Gain</a:t>
-                      </a:r>
-                    </a:p>
-                  </a:txBody>
-                  <a:tcPr>
-                    <a:solidFill>
-                      <a:srgbClr val="1F4E79"/>
-                    </a:solidFill>
-                  </a:tcPr>
-                </a:tc>
-                <a:tc>
-                  <a:txBody>
-                    <a:bodyPr/>
-                    <a:lstStyle/>
-                    <a:p>
-                      <a:pPr algn="ctr"/>
-                      <a:r>
-                        <a:rPr sz="1300" b="1">
-                          <a:solidFill>
-                            <a:srgbClr val="FFFFFF"/>
-                          </a:solidFill>
-                        </a:rPr>
-                        <a:t>Lecture</a:t>
                       </a:r>
                     </a:p>
                   </a:txBody>
@@ -6882,7 +6915,7 @@
                       <a:pPr algn="l"/>
                       <a:r>
                         <a:rPr sz="1300"/>
-                        <a:t>A. Dynamique</a:t>
+                        <a:t> 0 min</a:t>
                       </a:r>
                     </a:p>
                   </a:txBody>
@@ -6896,7 +6929,7 @@
                       <a:pPr algn="ctr"/>
                       <a:r>
                         <a:rPr sz="1300"/>
-                        <a:t>Verif. T_q a chaque CG</a:t>
+                        <a:t> 4,9 min</a:t>
                       </a:r>
                     </a:p>
                   </a:txBody>
@@ -6910,7 +6943,7 @@
                       <a:pPr algn="ctr"/>
                       <a:r>
                         <a:rPr sz="1300"/>
-                        <a:t>9,61 % (37/385)</a:t>
+                        <a:t> 953 h</a:t>
                       </a:r>
                     </a:p>
                   </a:txBody>
@@ -6924,7 +6957,7 @@
                       <a:pPr algn="ctr"/>
                       <a:r>
                         <a:rPr sz="1300"/>
-                        <a:t>—</a:t>
+                        <a:t>58,8 min</a:t>
                       </a:r>
                     </a:p>
                   </a:txBody>
@@ -6938,7 +6971,7 @@
                       <a:pPr algn="ctr"/>
                       <a:r>
                         <a:rPr sz="1300"/>
-                        <a:t>Pedagogique (cas concrets)</a:t>
+                        <a:t>88,05 % (339/385)</a:t>
                       </a:r>
                     </a:p>
                   </a:txBody>
@@ -6959,7 +6992,7 @@
                       <a:pPr algn="l"/>
                       <a:r>
                         <a:rPr sz="1300"/>
-                        <a:t>B. Operationnelle</a:t>
+                        <a:t>15 min</a:t>
                       </a:r>
                     </a:p>
                   </a:txBody>
@@ -6973,7 +7006,7 @@
                       <a:pPr algn="ctr"/>
                       <a:r>
                         <a:rPr sz="1300"/>
-                        <a:t>1 lift / alerte au last CG</a:t>
+                        <a:t>17,6 min</a:t>
                       </a:r>
                     </a:p>
                   </a:txBody>
@@ -6987,7 +7020,7 @@
                       <a:pPr algn="ctr"/>
                       <a:r>
                         <a:rPr sz="1300"/>
-                        <a:t>0 % (0/385)</a:t>
+                        <a:t> 505 h</a:t>
                       </a:r>
                     </a:p>
                   </a:txBody>
@@ -7001,7 +7034,7 @@
                       <a:pPr algn="ctr"/>
                       <a:r>
                         <a:rPr sz="1300"/>
-                        <a:t>330 h</a:t>
+                        <a:t>31,1 min</a:t>
                       </a:r>
                     </a:p>
                   </a:txBody>
@@ -7015,7 +7048,7 @@
                       <a:pPr algn="ctr"/>
                       <a:r>
                         <a:rPr sz="1300"/>
-                        <a:t>HEADLINE production</a:t>
+                        <a:t>33,77 % (130/385)</a:t>
                       </a:r>
                     </a:p>
                   </a:txBody>
@@ -7036,7 +7069,7 @@
                       <a:pPr algn="l"/>
                       <a:r>
                         <a:rPr sz="1300"/>
-                        <a:t>C. Protocole sweep theta</a:t>
+                        <a:t>20 min</a:t>
                       </a:r>
                     </a:p>
                   </a:txBody>
@@ -7050,7 +7083,7 @@
                       <a:pPr algn="ctr"/>
                       <a:r>
                         <a:rPr sz="1300"/>
-                        <a:t>Multi-preds + filtre theta</a:t>
+                        <a:t>22,0 min</a:t>
                       </a:r>
                     </a:p>
                   </a:txBody>
@@ -7064,7 +7097,7 @@
                       <a:pPr algn="ctr"/>
                       <a:r>
                         <a:rPr sz="1300"/>
-                        <a:t>5,45 % (21/385)</a:t>
+                        <a:t> 365 h</a:t>
                       </a:r>
                     </a:p>
                   </a:txBody>
@@ -7078,7 +7111,7 @@
                       <a:pPr algn="ctr"/>
                       <a:r>
                         <a:rPr sz="1300"/>
-                        <a:t>60 h</a:t>
+                        <a:t>22,5 min</a:t>
                       </a:r>
                     </a:p>
                   </a:txBody>
@@ -7092,7 +7125,7 @@
                       <a:pPr algn="ctr"/>
                       <a:r>
                         <a:rPr sz="1300"/>
-                        <a:t>Conformite jury</a:t>
+                        <a:t>28,05 % (108/385)</a:t>
                       </a:r>
                     </a:p>
                   </a:txBody>
@@ -7117,7 +7150,7 @@
                             <a:srgbClr val="2C8C5A"/>
                           </a:solidFill>
                         </a:rPr>
-                        <a:t>Baseline Meteorage 30 min</a:t>
+                        <a:t>25 min</a:t>
                       </a:r>
                     </a:p>
                   </a:txBody>
@@ -7135,7 +7168,7 @@
                             <a:srgbClr val="2C8C5A"/>
                           </a:solidFill>
                         </a:rPr>
-                        <a:t>Regle actuelle</a:t>
+                        <a:t>26,2 min</a:t>
                       </a:r>
                     </a:p>
                   </a:txBody>
@@ -7153,7 +7186,7 @@
                             <a:srgbClr val="2C8C5A"/>
                           </a:solidFill>
                         </a:rPr>
-                        <a:t>0 %</a:t>
+                        <a:t> 251 h</a:t>
                       </a:r>
                     </a:p>
                   </a:txBody>
@@ -7171,7 +7204,7 @@
                             <a:srgbClr val="2C8C5A"/>
                           </a:solidFill>
                         </a:rPr>
-                        <a:t>0 h</a:t>
+                        <a:t>15,4 min</a:t>
                       </a:r>
                     </a:p>
                   </a:txBody>
@@ -7189,7 +7222,7 @@
                             <a:srgbClr val="2C8C5A"/>
                           </a:solidFill>
                         </a:rPr>
-                        <a:t>Reference</a:t>
+                        <a:t>17,14 % ( 66/385) &lt;-- recommande</a:t>
                       </a:r>
                     </a:p>
                   </a:txBody>
@@ -7253,7 +7286,7 @@
                   <a:srgbClr val="1F4E79"/>
                 </a:solidFill>
               </a:rPr>
-              <a:t>Eval 2023-25 : 1352 alertes, 17 037 CG analysables, 385 CG &lt;3 km</a:t>
+              <a:t>Compromis gain / risque CG : plus T_min est haut, moins de risque et moins de gain</a:t>
             </a:r>
           </a:p>
           <a:p>
@@ -7443,7 +7476,7 @@
               </a:defRPr>
             </a:pPr>
             <a:r>
-              <a:t>16. Mesure A en action — 37 cas concrets visualisables (Streamlit)</a:t>
+              <a:t>16. Detail par aeroport — q=0,95, T_min=25</a:t>
             </a:r>
           </a:p>
         </p:txBody>
@@ -7478,7 +7511,7 @@
               </a:defRPr>
             </a:pPr>
             <a:r>
-              <a:t>Mesure dynamique a q=0,95 : 37 sous-estimations intermediaires en cours d'alerte</a:t>
+              <a:t>Profils tres differents selon la dynamique des orages locaux</a:t>
             </a:r>
           </a:p>
         </p:txBody>
@@ -7558,7 +7591,7 @@
                             <a:srgbClr val="FFFFFF"/>
                           </a:solidFill>
                         </a:rPr>
-                        <a:t>Aéroport</a:t>
+                        <a:t>Aeroport</a:t>
                       </a:r>
                     </a:p>
                   </a:txBody>
@@ -7580,7 +7613,7 @@
                             <a:srgbClr val="FFFFFF"/>
                           </a:solidFill>
                         </a:rPr>
-                        <a:t>Alerte</a:t>
+                        <a:t>Alertes</a:t>
                       </a:r>
                     </a:p>
                   </a:txBody>
@@ -7602,7 +7635,7 @@
                             <a:srgbClr val="FFFFFF"/>
                           </a:solidFill>
                         </a:rPr>
-                        <a:t>T_q prédit</a:t>
+                        <a:t>Timer moy.</a:t>
                       </a:r>
                     </a:p>
                   </a:txBody>
@@ -7624,7 +7657,7 @@
                             <a:srgbClr val="FFFFFF"/>
                           </a:solidFill>
                         </a:rPr>
-                        <a:t>Réel</a:t>
+                        <a:t>Gain/alerte</a:t>
                       </a:r>
                     </a:p>
                   </a:txBody>
@@ -7646,7 +7679,7 @@
                             <a:srgbClr val="FFFFFF"/>
                           </a:solidFill>
                         </a:rPr>
-                        <a:t>Écart</a:t>
+                        <a:t>Gain total</a:t>
                       </a:r>
                     </a:p>
                   </a:txBody>
@@ -7668,7 +7701,7 @@
                             <a:srgbClr val="FFFFFF"/>
                           </a:solidFill>
                         </a:rPr>
-                        <a:t>Distance prochain CG</a:t>
+                        <a:t>Risque CG</a:t>
                       </a:r>
                     </a:p>
                   </a:txBody>
@@ -7693,7 +7726,7 @@
                       <a:pPr algn="l"/>
                       <a:r>
                         <a:rPr sz="1300"/>
-                        <a:t>Pise</a:t>
+                        <a:t>Ajaccio</a:t>
                       </a:r>
                     </a:p>
                   </a:txBody>
@@ -7707,7 +7740,7 @@
                       <a:pPr algn="ctr"/>
                       <a:r>
                         <a:rPr sz="1300"/>
-                        <a:t>Pise_1319</a:t>
+                        <a:t>192</a:t>
                       </a:r>
                     </a:p>
                   </a:txBody>
@@ -7721,7 +7754,7 @@
                       <a:pPr algn="ctr"/>
                       <a:r>
                         <a:rPr sz="1300"/>
-                        <a:t>2,75 min</a:t>
+                        <a:t>26,0 min</a:t>
                       </a:r>
                     </a:p>
                   </a:txBody>
@@ -7735,7 +7768,7 @@
                       <a:pPr algn="ctr"/>
                       <a:r>
                         <a:rPr sz="1300"/>
-                        <a:t>35,78 min</a:t>
+                        <a:t>11,5 min</a:t>
                       </a:r>
                     </a:p>
                   </a:txBody>
@@ -7749,7 +7782,7 @@
                       <a:pPr algn="ctr"/>
                       <a:r>
                         <a:rPr sz="1300"/>
-                        <a:t>+33,03</a:t>
+                        <a:t>37 h</a:t>
                       </a:r>
                     </a:p>
                   </a:txBody>
@@ -7763,7 +7796,7 @@
                       <a:pPr algn="ctr"/>
                       <a:r>
                         <a:rPr sz="1300"/>
-                        <a:t>1,87 km</a:t>
+                        <a:t>16,28 % ( 7/43)</a:t>
                       </a:r>
                     </a:p>
                   </a:txBody>
@@ -7798,7 +7831,7 @@
                       <a:pPr algn="ctr"/>
                       <a:r>
                         <a:rPr sz="1300"/>
-                        <a:t>Bastia_810</a:t>
+                        <a:t>233</a:t>
                       </a:r>
                     </a:p>
                   </a:txBody>
@@ -7812,7 +7845,7 @@
                       <a:pPr algn="ctr"/>
                       <a:r>
                         <a:rPr sz="1300"/>
-                        <a:t>12,93 min</a:t>
+                        <a:t>26,3 min</a:t>
                       </a:r>
                     </a:p>
                   </a:txBody>
@@ -7826,7 +7859,7 @@
                       <a:pPr algn="ctr"/>
                       <a:r>
                         <a:rPr sz="1300"/>
-                        <a:t>45,87 min</a:t>
+                        <a:t>15,9 min</a:t>
                       </a:r>
                     </a:p>
                   </a:txBody>
@@ -7840,7 +7873,7 @@
                       <a:pPr algn="ctr"/>
                       <a:r>
                         <a:rPr sz="1300"/>
-                        <a:t>+32,93</a:t>
+                        <a:t>62 h</a:t>
                       </a:r>
                     </a:p>
                   </a:txBody>
@@ -7854,7 +7887,7 @@
                       <a:pPr algn="ctr"/>
                       <a:r>
                         <a:rPr sz="1300"/>
-                        <a:t>2,43 km</a:t>
+                        <a:t> 7,38 % ( 9/122)</a:t>
                       </a:r>
                     </a:p>
                   </a:txBody>
@@ -7875,7 +7908,7 @@
                       <a:pPr algn="l"/>
                       <a:r>
                         <a:rPr sz="1300"/>
-                        <a:t>Ajaccio</a:t>
+                        <a:t>Biarritz</a:t>
                       </a:r>
                     </a:p>
                   </a:txBody>
@@ -7889,7 +7922,7 @@
                       <a:pPr algn="ctr"/>
                       <a:r>
                         <a:rPr sz="1300"/>
-                        <a:t>Ajaccio_905</a:t>
+                        <a:t>217</a:t>
                       </a:r>
                     </a:p>
                   </a:txBody>
@@ -7903,7 +7936,7 @@
                       <a:pPr algn="ctr"/>
                       <a:r>
                         <a:rPr sz="1300"/>
-                        <a:t>7,56 min</a:t>
+                        <a:t>26,4 min</a:t>
                       </a:r>
                     </a:p>
                   </a:txBody>
@@ -7917,7 +7950,7 @@
                       <a:pPr algn="ctr"/>
                       <a:r>
                         <a:rPr sz="1300"/>
-                        <a:t>37,23 min</a:t>
+                        <a:t>12,7 min</a:t>
                       </a:r>
                     </a:p>
                   </a:txBody>
@@ -7931,7 +7964,7 @@
                       <a:pPr algn="ctr"/>
                       <a:r>
                         <a:rPr sz="1300"/>
-                        <a:t>+29,67</a:t>
+                        <a:t>46 h</a:t>
                       </a:r>
                     </a:p>
                   </a:txBody>
@@ -7945,7 +7978,7 @@
                       <a:pPr algn="ctr"/>
                       <a:r>
                         <a:rPr sz="1300"/>
-                        <a:t>1,44 km</a:t>
+                        <a:t>12,73 % ( 7/55)</a:t>
                       </a:r>
                     </a:p>
                   </a:txBody>
@@ -7966,7 +7999,7 @@
                       <a:pPr algn="l"/>
                       <a:r>
                         <a:rPr sz="1300"/>
-                        <a:t>Bastia</a:t>
+                        <a:t>Nantes</a:t>
                       </a:r>
                     </a:p>
                   </a:txBody>
@@ -7980,7 +8013,7 @@
                       <a:pPr algn="ctr"/>
                       <a:r>
                         <a:rPr sz="1300"/>
-                        <a:t>Bastia_903</a:t>
+                        <a:t>88</a:t>
                       </a:r>
                     </a:p>
                   </a:txBody>
@@ -7994,7 +8027,7 @@
                       <a:pPr algn="ctr"/>
                       <a:r>
                         <a:rPr sz="1300"/>
-                        <a:t>13,46 min</a:t>
+                        <a:t>25,7 min</a:t>
                       </a:r>
                     </a:p>
                   </a:txBody>
@@ -8008,7 +8041,7 @@
                       <a:pPr algn="ctr"/>
                       <a:r>
                         <a:rPr sz="1300"/>
-                        <a:t>31,20 min</a:t>
+                        <a:t>16,0 min</a:t>
                       </a:r>
                     </a:p>
                   </a:txBody>
@@ -8022,7 +8055,7 @@
                       <a:pPr algn="ctr"/>
                       <a:r>
                         <a:rPr sz="1300"/>
-                        <a:t>+17,74</a:t>
+                        <a:t>24 h</a:t>
                       </a:r>
                     </a:p>
                   </a:txBody>
@@ -8036,7 +8069,7 @@
                       <a:pPr algn="ctr"/>
                       <a:r>
                         <a:rPr sz="1300"/>
-                        <a:t>0,65 km</a:t>
+                        <a:t>26,92 % ( 7/26)</a:t>
                       </a:r>
                     </a:p>
                   </a:txBody>
@@ -8057,7 +8090,7 @@
                       <a:pPr algn="l"/>
                       <a:r>
                         <a:rPr sz="1300"/>
-                        <a:t>Biarritz</a:t>
+                        <a:t>Pise</a:t>
                       </a:r>
                     </a:p>
                   </a:txBody>
@@ -8071,7 +8104,7 @@
                       <a:pPr algn="ctr"/>
                       <a:r>
                         <a:rPr sz="1300"/>
-                        <a:t>Biarritz_776</a:t>
+                        <a:t>243</a:t>
                       </a:r>
                     </a:p>
                   </a:txBody>
@@ -8085,7 +8118,7 @@
                       <a:pPr algn="ctr"/>
                       <a:r>
                         <a:rPr sz="1300"/>
-                        <a:t>1,97 min</a:t>
+                        <a:t>26,1 min</a:t>
                       </a:r>
                     </a:p>
                   </a:txBody>
@@ -8099,7 +8132,7 @@
                       <a:pPr algn="ctr"/>
                       <a:r>
                         <a:rPr sz="1300"/>
-                        <a:t>9,28 min</a:t>
+                        <a:t>20,4 min</a:t>
                       </a:r>
                     </a:p>
                   </a:txBody>
@@ -8113,7 +8146,7 @@
                       <a:pPr algn="ctr"/>
                       <a:r>
                         <a:rPr sz="1300"/>
-                        <a:t>+7,32</a:t>
+                        <a:t>83 h</a:t>
                       </a:r>
                     </a:p>
                   </a:txBody>
@@ -8127,7 +8160,7 @@
                       <a:pPr algn="ctr"/>
                       <a:r>
                         <a:rPr sz="1300"/>
-                        <a:t>2,45 km</a:t>
+                        <a:t>25,90 % (36/139)</a:t>
                       </a:r>
                     </a:p>
                   </a:txBody>
@@ -8171,7 +8204,7 @@
                   <a:srgbClr val="1F4E79"/>
                 </a:solidFill>
               </a:rPr>
-              <a:t>Mesure dynamique a q=0,95 : 37 sous-estimations intermediaires en cours d'alerte</a:t>
+              <a:t>Interpretation :</a:t>
             </a:r>
           </a:p>
           <a:p>
@@ -8181,7 +8214,7 @@
                   <a:srgbClr val="000000"/>
                 </a:solidFill>
               </a:rPr>
-              <a:t>  37 cas a q=0,95 ou T_q &lt; gap reel ET prochain CG &lt;3 km. Visualisables un par un</a:t>
+              <a:t>  - Bastia et Pise : orages denses et longs -&gt; plus de risque (~19 %).</a:t>
             </a:r>
           </a:p>
           <a:p>
@@ -8191,7 +8224,7 @@
                   <a:srgbClr val="000000"/>
                 </a:solidFill>
               </a:rPr>
-              <a:t>  dans Streamlit. Servent a comprendre ou le modele se trompe en cours d'alerte.</a:t>
+              <a:t>  - Ajaccio : profil le plus calme -&gt; risque minimal (~9 %), gain modere.</a:t>
             </a:r>
           </a:p>
           <a:p>
@@ -8201,6 +8234,16 @@
                   <a:srgbClr val="A83232"/>
                 </a:solidFill>
               </a:rPr>
+              <a:t>  - Toutes les alertes evaluees (973 au total).</a:t>
+            </a:r>
+          </a:p>
+          <a:p>
+            <a:r>
+              <a:rPr sz="1400" b="1">
+                <a:solidFill>
+                  <a:srgbClr val="A83232"/>
+                </a:solidFill>
+              </a:rPr>
               <a:t/>
             </a:r>
           </a:p>
@@ -8211,7 +8254,7 @@
                   <a:srgbClr val="A83232"/>
                 </a:solidFill>
               </a:rPr>
-              <a:t>  En operationnel : un autre CG arrive APRES T_q donc on ne leverait PAS</a:t>
+              <a:t>Le timer effectif moyen ~27 min est tres proche du T_min=25. Donc le modele</a:t>
             </a:r>
           </a:p>
           <a:p>
@@ -8221,7 +8264,7 @@
                   <a:srgbClr val="A83232"/>
                 </a:solidFill>
               </a:rPr>
-              <a:t>  l'alerte de toute facon (reset du compteur). Le vrai risque mesure par le</a:t>
+              <a:t>est souvent appele a lever au plancher : preuve que sans T_min, le modele</a:t>
             </a:r>
           </a:p>
           <a:p>
@@ -8231,17 +8274,7 @@
                   <a:srgbClr val="A83232"/>
                 </a:solidFill>
               </a:rPr>
-              <a:t>  protocole reste a 2,86 % a q=0,99.</a:t>
-            </a:r>
-          </a:p>
-          <a:p>
-            <a:r>
-              <a:rPr sz="1400" b="1">
-                <a:solidFill>
-                  <a:srgbClr val="A83232"/>
-                </a:solidFill>
-              </a:rPr>
-              <a:t/>
+              <a:t>leverait beaucoup trop tot.</a:t>
             </a:r>
           </a:p>
           <a:p>
@@ -10183,7 +10216,7 @@
             </a:pPr>
             <a:r>
               <a:rPr sz="1300" b="0"/>
-              <a:t>   . Weibull AFT entraine par MLE (gere la censure native), 17 variables dont rythme = 57 % du pouvoir predictif</a:t>
+              <a:t>   . Weibull AFT entraine par MLE (gere la censure native)</a:t>
             </a:r>
           </a:p>
           <a:p>
@@ -10194,7 +10227,7 @@
             </a:pPr>
             <a:r>
               <a:rPr sz="1300" b="0"/>
-              <a:t>   . Calibration empirique robuste (winsorization + monotonicite)</a:t>
+              <a:t>   . 17 variables dont rythme = 57 % du pouvoir predictif</a:t>
             </a:r>
           </a:p>
           <a:p>
@@ -10205,7 +10238,7 @@
             </a:pPr>
             <a:r>
               <a:rPr sz="1300" b="0"/>
-              <a:t>   . Verification non-parametrique independante (G(A), risque empirique 3 km)</a:t>
+              <a:t>   . Calibration empirique robuste (winsorization + monotonicite)</a:t>
             </a:r>
           </a:p>
           <a:p>
@@ -10216,7 +10249,7 @@
             </a:pPr>
             <a:r>
               <a:rPr sz="1500" b="0"/>
-              <a:t>   . Reproduction fidele du protocole officiel Data Battle</a:t>
+              <a:t>   . Simulation operationnelle reelle (timer CG par CG, plancher T_min)</a:t>
             </a:r>
           </a:p>
           <a:p>
@@ -10246,7 +10279,7 @@
                   <a:srgbClr val="2C8C5A"/>
                 </a:solidFill>
               </a:rPr>
-              <a:t>- Ce qu'on gagne sur eval 2023-25 (1352 alertes, 385 CG &lt;3 km, q=0,95)</a:t>
+              <a:t>- Ce qu'on gagne sur eval 2023-25 (973 alertes, q=0,95)</a:t>
             </a:r>
           </a:p>
           <a:p>
@@ -10261,7 +10294,7 @@
                   <a:srgbClr val="2C8C5A"/>
                 </a:solidFill>
               </a:rPr>
-              <a:t>   . Mesure A (dynamique) : 37 cas pedagogiques visualisables / 9,61 % risque</a:t>
+              <a:t>   . T_min=25 (RECOMMANDE) : 251 h gain, 17 % risque CG (66/385)</a:t>
             </a:r>
           </a:p>
           <a:p>
@@ -10276,7 +10309,7 @@
                   <a:srgbClr val="595959"/>
                 </a:solidFill>
               </a:rPr>
-              <a:t>   . Mesure B (operationnelle, 1 lift/alerte) : 0 % CG, 330 h GAIN — headline production</a:t>
+              <a:t>   . T_min=20 (agressif)   : 365 h gain, 28 % risque</a:t>
             </a:r>
           </a:p>
           <a:p>
@@ -10287,7 +10320,7 @@
             </a:pPr>
             <a:r>
               <a:rPr sz="1500" b="0"/>
-              <a:t>   . Mesure C (sweep theta jury) : 5,45 % / 60 h sur 68 alertes filtrees</a:t>
+              <a:t>   . T_min=30 (prudent)    : 136 h gain,  9 % risque</a:t>
             </a:r>
           </a:p>
           <a:p>
@@ -10302,7 +10335,7 @@
                   <a:srgbClr val="1F4E79"/>
                 </a:solidFill>
               </a:rPr>
-              <a:t>   . Baseline 30 min Meteorage : 0 % / 0 h (reference)</a:t>
+              <a:t>   . Baseline 30 min Meteorage : 0 h, 0 % (reference parfaite)</a:t>
             </a:r>
           </a:p>
           <a:p>
@@ -10324,7 +10357,7 @@
             </a:pPr>
             <a:r>
               <a:rPr sz="1300" b="0"/>
-              <a:t>- Validation independante</a:t>
+              <a:t>- Limites assumees</a:t>
             </a:r>
           </a:p>
           <a:p>
@@ -10335,7 +10368,7 @@
             </a:pPr>
             <a:r>
               <a:rPr sz="1300" b="0"/>
-              <a:t>   . Risque empirique non-parametrique coherent avec le modele parametrique</a:t>
+              <a:t>   . Sans plancher T_min, le modele leverait trop tot (88 % risque)</a:t>
             </a:r>
           </a:p>
           <a:p>
@@ -10346,7 +10379,7 @@
             </a:pPr>
             <a:r>
               <a:rPr sz="1300" b="0"/>
-              <a:t>   . Demo Streamlit interactive : 3 mesures visibles + timeline graphique des incidents</a:t>
+              <a:t>   . Pour atteindre R &lt; 2 % : classifieur secondaire 'dernier CG' a developper</a:t>
             </a:r>
           </a:p>
           <a:p>

--- a/presentation_oral.pptx
+++ b/presentation_oral.pptx
@@ -149,7 +149,7 @@
   <pc:docChgLst>
     <pc:chgData name="Enrique Alves" userId="5d13ffe67fcee0a0" providerId="LiveId" clId="{6B2B118D-CA2E-4A9B-BC7D-9BAAFE503825}"/>
     <pc:docChg chg="modSld">
-      <pc:chgData name="Enrique Alves" userId="5d13ffe67fcee0a0" providerId="LiveId" clId="{6B2B118D-CA2E-4A9B-BC7D-9BAAFE503825}" dt="2026-05-21T19:20:51.831" v="18" actId="14734"/>
+      <pc:chgData name="Enrique Alves" userId="5d13ffe67fcee0a0" providerId="LiveId" clId="{6B2B118D-CA2E-4A9B-BC7D-9BAAFE503825}" dt="2026-05-21T22:37:32.013" v="32" actId="20577"/>
       <pc:docMkLst>
         <pc:docMk/>
       </pc:docMkLst>
@@ -269,6 +269,21 @@
         </pc:picChg>
       </pc:sldChg>
       <pc:sldChg chg="modSp mod">
+        <pc:chgData name="Enrique Alves" userId="5d13ffe67fcee0a0" providerId="LiveId" clId="{6B2B118D-CA2E-4A9B-BC7D-9BAAFE503825}" dt="2026-05-21T22:37:32.013" v="32" actId="20577"/>
+        <pc:sldMkLst>
+          <pc:docMk/>
+          <pc:sldMk cId="0" sldId="271"/>
+        </pc:sldMkLst>
+        <pc:graphicFrameChg chg="modGraphic">
+          <ac:chgData name="Enrique Alves" userId="5d13ffe67fcee0a0" providerId="LiveId" clId="{6B2B118D-CA2E-4A9B-BC7D-9BAAFE503825}" dt="2026-05-21T22:37:32.013" v="32" actId="20577"/>
+          <ac:graphicFrameMkLst>
+            <pc:docMk/>
+            <pc:sldMk cId="0" sldId="271"/>
+            <ac:graphicFrameMk id="4" creationId="{00000000-0000-0000-0000-000000000000}"/>
+          </ac:graphicFrameMkLst>
+        </pc:graphicFrameChg>
+      </pc:sldChg>
+      <pc:sldChg chg="modSp mod">
         <pc:chgData name="Enrique Alves" userId="5d13ffe67fcee0a0" providerId="LiveId" clId="{6B2B118D-CA2E-4A9B-BC7D-9BAAFE503825}" dt="2026-05-21T17:35:12.258" v="11" actId="1076"/>
         <pc:sldMkLst>
           <pc:docMk/>
@@ -475,7 +490,7 @@
           <a:p>
             <a:fld id="{5BCAD085-E8A6-8845-BD4E-CB4CCA059FC4}" type="datetimeFigureOut">
               <a:rPr lang="en-US" smtClean="0"/>
-              <a:t>5/21/2026</a:t>
+              <a:t>5/22/2026</a:t>
             </a:fld>
             <a:endParaRPr lang="en-US"/>
           </a:p>
@@ -643,7 +658,7 @@
           <a:p>
             <a:fld id="{5BCAD085-E8A6-8845-BD4E-CB4CCA059FC4}" type="datetimeFigureOut">
               <a:rPr lang="en-US" smtClean="0"/>
-              <a:t>5/21/2026</a:t>
+              <a:t>5/22/2026</a:t>
             </a:fld>
             <a:endParaRPr lang="en-US"/>
           </a:p>
@@ -821,7 +836,7 @@
           <a:p>
             <a:fld id="{5BCAD085-E8A6-8845-BD4E-CB4CCA059FC4}" type="datetimeFigureOut">
               <a:rPr lang="en-US" smtClean="0"/>
-              <a:t>5/21/2026</a:t>
+              <a:t>5/22/2026</a:t>
             </a:fld>
             <a:endParaRPr lang="en-US"/>
           </a:p>
@@ -989,7 +1004,7 @@
           <a:p>
             <a:fld id="{5BCAD085-E8A6-8845-BD4E-CB4CCA059FC4}" type="datetimeFigureOut">
               <a:rPr lang="en-US" smtClean="0"/>
-              <a:t>5/21/2026</a:t>
+              <a:t>5/22/2026</a:t>
             </a:fld>
             <a:endParaRPr lang="en-US"/>
           </a:p>
@@ -1234,7 +1249,7 @@
           <a:p>
             <a:fld id="{5BCAD085-E8A6-8845-BD4E-CB4CCA059FC4}" type="datetimeFigureOut">
               <a:rPr lang="en-US" smtClean="0"/>
-              <a:t>5/21/2026</a:t>
+              <a:t>5/22/2026</a:t>
             </a:fld>
             <a:endParaRPr lang="en-US"/>
           </a:p>
@@ -1519,7 +1534,7 @@
           <a:p>
             <a:fld id="{5BCAD085-E8A6-8845-BD4E-CB4CCA059FC4}" type="datetimeFigureOut">
               <a:rPr lang="en-US" smtClean="0"/>
-              <a:t>5/21/2026</a:t>
+              <a:t>5/22/2026</a:t>
             </a:fld>
             <a:endParaRPr lang="en-US"/>
           </a:p>
@@ -1938,7 +1953,7 @@
           <a:p>
             <a:fld id="{5BCAD085-E8A6-8845-BD4E-CB4CCA059FC4}" type="datetimeFigureOut">
               <a:rPr lang="en-US" smtClean="0"/>
-              <a:t>5/21/2026</a:t>
+              <a:t>5/22/2026</a:t>
             </a:fld>
             <a:endParaRPr lang="en-US"/>
           </a:p>
@@ -2055,7 +2070,7 @@
           <a:p>
             <a:fld id="{5BCAD085-E8A6-8845-BD4E-CB4CCA059FC4}" type="datetimeFigureOut">
               <a:rPr lang="en-US" smtClean="0"/>
-              <a:t>5/21/2026</a:t>
+              <a:t>5/22/2026</a:t>
             </a:fld>
             <a:endParaRPr lang="en-US"/>
           </a:p>
@@ -2150,7 +2165,7 @@
           <a:p>
             <a:fld id="{5BCAD085-E8A6-8845-BD4E-CB4CCA059FC4}" type="datetimeFigureOut">
               <a:rPr lang="en-US" smtClean="0"/>
-              <a:t>5/21/2026</a:t>
+              <a:t>5/22/2026</a:t>
             </a:fld>
             <a:endParaRPr lang="en-US"/>
           </a:p>
@@ -2425,7 +2440,7 @@
           <a:p>
             <a:fld id="{5BCAD085-E8A6-8845-BD4E-CB4CCA059FC4}" type="datetimeFigureOut">
               <a:rPr lang="en-US" smtClean="0"/>
-              <a:t>5/21/2026</a:t>
+              <a:t>5/22/2026</a:t>
             </a:fld>
             <a:endParaRPr lang="en-US"/>
           </a:p>
@@ -2677,7 +2692,7 @@
           <a:p>
             <a:fld id="{5BCAD085-E8A6-8845-BD4E-CB4CCA059FC4}" type="datetimeFigureOut">
               <a:rPr lang="en-US" smtClean="0"/>
-              <a:t>5/21/2026</a:t>
+              <a:t>5/22/2026</a:t>
             </a:fld>
             <a:endParaRPr lang="en-US"/>
           </a:p>
@@ -2888,7 +2903,7 @@
           <a:p>
             <a:fld id="{5BCAD085-E8A6-8845-BD4E-CB4CCA059FC4}" type="datetimeFigureOut">
               <a:rPr lang="en-US" smtClean="0"/>
-              <a:t>5/21/2026</a:t>
+              <a:t>5/22/2026</a:t>
             </a:fld>
             <a:endParaRPr lang="en-US"/>
           </a:p>
@@ -6281,7 +6296,55 @@
               </a:defRPr>
             </a:pPr>
             <a:r>
-              <a:t>14. Simulation operationnelle reelle</a:t>
+              <a:t>INCIDENT = CG &lt;3 km arrivant APRES notre levee. IC ne comptent pas (features seulement).</a:t>
+            </a:r>
+          </a:p>
+          <a:p>
+            <a:pPr>
+              <a:defRPr sz="2600" b="1">
+                <a:solidFill>
+                  <a:srgbClr val="1F4E79"/>
+                </a:solidFill>
+              </a:defRPr>
+            </a:pPr>
+            <a:r>
+              <a:t>Le plancher T_min est le levier operationnel ajustable par l operateur :</a:t>
+            </a:r>
+          </a:p>
+          <a:p>
+            <a:pPr>
+              <a:defRPr sz="2600" b="1">
+                <a:solidFill>
+                  <a:srgbClr val="1F4E79"/>
+                </a:solidFill>
+              </a:defRPr>
+            </a:pPr>
+            <a:r>
+              <a:t>   T_min = 0  -&gt; modele pur (risque max, gain max).</a:t>
+            </a:r>
+          </a:p>
+          <a:p>
+            <a:pPr>
+              <a:defRPr sz="2600" b="1">
+                <a:solidFill>
+                  <a:srgbClr val="1F4E79"/>
+                </a:solidFill>
+              </a:defRPr>
+            </a:pPr>
+            <a:r>
+              <a:t>   T_min = 25 -&gt; compromis recommande.</a:t>
+            </a:r>
+          </a:p>
+          <a:p>
+            <a:pPr>
+              <a:defRPr sz="2600" b="1">
+                <a:solidFill>
+                  <a:srgbClr val="1F4E79"/>
+                </a:solidFill>
+              </a:defRPr>
+            </a:pPr>
+            <a:r>
+              <a:t>   T_min = 30 -&gt; baseline Meteorage (risque ~0, gain ~0).</a:t>
             </a:r>
           </a:p>
         </p:txBody>
@@ -6316,7 +6379,7 @@
               </a:defRPr>
             </a:pPr>
             <a:r>
-              <a:t>Timer = max(T_q, T_min). Reset si nouveau CG, lift si timer expire.</a:t>
+              <a:t>A chaque CG : timer = max(T_q, T_min). Reset si nouveau CG. Lift si timer expire.</a:t>
             </a:r>
           </a:p>
         </p:txBody>
@@ -6729,7 +6792,7 @@
               </a:defRPr>
             </a:pPr>
             <a:r>
-              <a:t>Compromis gain / risque CG : plus T_min est haut, moins de risque et moins de gain</a:t>
+              <a:t>Plus T_min haut = moins de risque, moins de gain. Compromis ajustable.</a:t>
             </a:r>
           </a:p>
         </p:txBody>
@@ -6740,7 +6803,13 @@
           <p:cNvGraphicFramePr>
             <a:graphicFrameLocks noGrp="1"/>
           </p:cNvGraphicFramePr>
-          <p:nvPr/>
+          <p:nvPr>
+            <p:extLst>
+              <p:ext uri="{D42A27DB-BD31-4B8C-83A1-F6EECF244321}">
+                <p14:modId xmlns:p14="http://schemas.microsoft.com/office/powerpoint/2010/main" val="762178806"/>
+              </p:ext>
+            </p:extLst>
+          </p:nvPr>
         </p:nvGraphicFramePr>
         <p:xfrm>
           <a:off x="457200" y="1554480"/>
@@ -6971,7 +7040,7 @@
                       <a:pPr algn="ctr"/>
                       <a:r>
                         <a:rPr sz="1300"/>
-                        <a:t>88,05 % (339/385)</a:t>
+                        <a:t>88,05 % (339/385) — non deployable</a:t>
                       </a:r>
                     </a:p>
                   </a:txBody>
@@ -6992,7 +7061,7 @@
                       <a:pPr algn="l"/>
                       <a:r>
                         <a:rPr sz="1300"/>
-                        <a:t>15 min</a:t>
+                        <a:t>20 min</a:t>
                       </a:r>
                     </a:p>
                   </a:txBody>
@@ -7006,7 +7075,7 @@
                       <a:pPr algn="ctr"/>
                       <a:r>
                         <a:rPr sz="1300"/>
-                        <a:t>17,6 min</a:t>
+                        <a:t>22,0 min</a:t>
                       </a:r>
                     </a:p>
                   </a:txBody>
@@ -7020,7 +7089,7 @@
                       <a:pPr algn="ctr"/>
                       <a:r>
                         <a:rPr sz="1300"/>
-                        <a:t> 505 h</a:t>
+                        <a:t> 365 h</a:t>
                       </a:r>
                     </a:p>
                   </a:txBody>
@@ -7034,7 +7103,7 @@
                       <a:pPr algn="ctr"/>
                       <a:r>
                         <a:rPr sz="1300"/>
-                        <a:t>31,1 min</a:t>
+                        <a:t>22,5 min</a:t>
                       </a:r>
                     </a:p>
                   </a:txBody>
@@ -7048,7 +7117,7 @@
                       <a:pPr algn="ctr"/>
                       <a:r>
                         <a:rPr sz="1300"/>
-                        <a:t>33,77 % (130/385)</a:t>
+                        <a:t>28,05 % (108/385) — agressif</a:t>
                       </a:r>
                     </a:p>
                   </a:txBody>
@@ -7069,7 +7138,7 @@
                       <a:pPr algn="l"/>
                       <a:r>
                         <a:rPr sz="1300"/>
-                        <a:t>20 min</a:t>
+                        <a:t>25 min</a:t>
                       </a:r>
                     </a:p>
                   </a:txBody>
@@ -7083,7 +7152,7 @@
                       <a:pPr algn="ctr"/>
                       <a:r>
                         <a:rPr sz="1300"/>
-                        <a:t>22,0 min</a:t>
+                        <a:t>26,2 min</a:t>
                       </a:r>
                     </a:p>
                   </a:txBody>
@@ -7097,7 +7166,7 @@
                       <a:pPr algn="ctr"/>
                       <a:r>
                         <a:rPr sz="1300"/>
-                        <a:t> 365 h</a:t>
+                        <a:t> 251 h</a:t>
                       </a:r>
                     </a:p>
                   </a:txBody>
@@ -7111,7 +7180,7 @@
                       <a:pPr algn="ctr"/>
                       <a:r>
                         <a:rPr sz="1300"/>
-                        <a:t>22,5 min</a:t>
+                        <a:t>15,4 min</a:t>
                       </a:r>
                     </a:p>
                   </a:txBody>
@@ -7125,7 +7194,7 @@
                       <a:pPr algn="ctr"/>
                       <a:r>
                         <a:rPr sz="1300"/>
-                        <a:t>28,05 % (108/385)</a:t>
+                        <a:t>17,14 % ( 66/385) — RECOMMANDE</a:t>
                       </a:r>
                     </a:p>
                   </a:txBody>
@@ -7150,7 +7219,7 @@
                             <a:srgbClr val="2C8C5A"/>
                           </a:solidFill>
                         </a:rPr>
-                        <a:t>25 min</a:t>
+                        <a:t>30 min</a:t>
                       </a:r>
                     </a:p>
                   </a:txBody>
@@ -7168,7 +7237,7 @@
                             <a:srgbClr val="2C8C5A"/>
                           </a:solidFill>
                         </a:rPr>
-                        <a:t>26,2 min</a:t>
+                        <a:t>30,0 min</a:t>
                       </a:r>
                     </a:p>
                   </a:txBody>
@@ -7186,7 +7255,7 @@
                             <a:srgbClr val="2C8C5A"/>
                           </a:solidFill>
                         </a:rPr>
-                        <a:t> 251 h</a:t>
+                        <a:t> 136 h</a:t>
                       </a:r>
                     </a:p>
                   </a:txBody>
@@ -7204,7 +7273,7 @@
                             <a:srgbClr val="2C8C5A"/>
                           </a:solidFill>
                         </a:rPr>
-                        <a:t>15,4 min</a:t>
+                        <a:t> 8,4 min</a:t>
                       </a:r>
                     </a:p>
                   </a:txBody>
@@ -7216,14 +7285,27 @@
                     <a:lstStyle/>
                     <a:p>
                       <a:pPr algn="ctr"/>
+                      <a:r>
+                        <a:rPr sz="1300" b="1" dirty="0">
+                          <a:solidFill>
+                            <a:srgbClr val="2C8C5A"/>
+                          </a:solidFill>
+                        </a:rPr>
+                        <a:t> 8,57 % ( 33/385) — ~ baseline</a:t>
+                      </a:r>
                       <a:r>
                         <a:rPr sz="1300" b="1">
                           <a:solidFill>
                             <a:srgbClr val="2C8C5A"/>
                           </a:solidFill>
                         </a:rPr>
-                        <a:t>17,14 % ( 66/385) &lt;-- recommande</a:t>
-                      </a:r>
+                        <a:t/>
+                      </a:r>
+                      <a:endParaRPr sz="1300" b="1" dirty="0">
+                        <a:solidFill>
+                          <a:srgbClr val="2C8C5A"/>
+                        </a:solidFill>
+                      </a:endParaRPr>
                     </a:p>
                   </a:txBody>
                   <a:tcPr/>
@@ -7286,7 +7368,7 @@
                   <a:srgbClr val="1F4E79"/>
                 </a:solidFill>
               </a:rPr>
-              <a:t>Compromis gain / risque CG : plus T_min est haut, moins de risque et moins de gain</a:t>
+              <a:t>Plus T_min haut = moins de risque, moins de gain. Compromis ajustable.</a:t>
             </a:r>
           </a:p>
           <a:p>
@@ -7298,21 +7380,15 @@
               </a:rPr>
               <a:t>   - Generation predictions.csv (1 pred / CG, confidence = S(30 min | X))</a:t>
             </a:r>
-            <a:r>
-              <a:rPr sz="1300" b="1">
-                <a:solidFill>
-                  <a:srgbClr val="A83232"/>
-                </a:solidFill>
-              </a:rPr>
-              <a:t/>
-            </a:r>
+          </a:p>
+          <a:p>
             <a:r>
               <a:rPr sz="1300">
                 <a:solidFill>
                   <a:srgbClr val="000000"/>
                 </a:solidFill>
               </a:rPr>
-              <a:t/>
+              <a:t>   - Sweep theta : on garde les preds avec confidence &gt;= theta, min par alerte</a:t>
             </a:r>
           </a:p>
           <a:p>
@@ -7322,23 +7398,17 @@
                   <a:srgbClr val="000000"/>
                 </a:solidFill>
               </a:rPr>
-              <a:t>   - Sweep theta : on garde les preds avec confidence &gt;= theta, min par alerte</a:t>
-            </a:r>
-            <a:r>
-              <a:rPr sz="1300" b="1">
-                <a:solidFill>
-                  <a:srgbClr val="2C8C5A"/>
-                </a:solidFill>
-              </a:rPr>
-              <a:t/>
-            </a:r>
+              <a:t>   - Meilleur point operationnel : theta=0,95 → R=3,61 %, gain 26 h</a:t>
+            </a:r>
+          </a:p>
+          <a:p>
             <a:r>
               <a:rPr sz="1300">
                 <a:solidFill>
                   <a:srgbClr val="000000"/>
                 </a:solidFill>
               </a:rPr>
-              <a:t/>
+              <a:t>   - Borne oracle (last CG connu, q=0,95) : R=0,60 %, gain ~330 h</a:t>
             </a:r>
           </a:p>
           <a:p>
@@ -7348,75 +7418,7 @@
                   <a:srgbClr val="000000"/>
                 </a:solidFill>
               </a:rPr>
-              <a:t>   - Meilleur point operationnel : theta=0,95 → R=3,61 %, gain 26 h</a:t>
-            </a:r>
-            <a:r>
-              <a:rPr sz="1300" b="1">
-                <a:solidFill>
-                  <a:srgbClr val="2C8C5A"/>
-                </a:solidFill>
-              </a:rPr>
-              <a:t/>
-            </a:r>
-            <a:r>
-              <a:rPr sz="1300">
-                <a:solidFill>
-                  <a:srgbClr val="000000"/>
-                </a:solidFill>
-              </a:rPr>
-              <a:t/>
-            </a:r>
-          </a:p>
-          <a:p>
-            <a:r>
-              <a:rPr sz="1300">
-                <a:solidFill>
-                  <a:srgbClr val="000000"/>
-                </a:solidFill>
-              </a:rPr>
-              <a:t>   - Borne oracle (last CG connu, q=0,95) : R=0,60 %, gain ~330 h</a:t>
-            </a:r>
-            <a:r>
-              <a:rPr sz="1300" b="1">
-                <a:solidFill>
-                  <a:srgbClr val="2C8C5A"/>
-                </a:solidFill>
-              </a:rPr>
-              <a:t/>
-            </a:r>
-            <a:r>
-              <a:rPr sz="1300">
-                <a:solidFill>
-                  <a:srgbClr val="000000"/>
-                </a:solidFill>
-              </a:rPr>
-              <a:t/>
-            </a:r>
-          </a:p>
-          <a:p>
-            <a:r>
-              <a:rPr sz="1300">
-                <a:solidFill>
-                  <a:srgbClr val="000000"/>
-                </a:solidFill>
-              </a:rPr>
               <a:t>   - Baseline Meteorage 30 min : R=1,04 % (reference)</a:t>
-            </a:r>
-            <a:r>
-              <a:rPr sz="1300" b="1">
-                <a:solidFill>
-                  <a:srgbClr val="2C8C5A"/>
-                </a:solidFill>
-              </a:rPr>
-              <a:t/>
-            </a:r>
-            <a:r>
-              <a:rPr sz="1300">
-                <a:solidFill>
-                  <a:srgbClr val="000000"/>
-                </a:solidFill>
-              </a:rPr>
-              <a:t/>
             </a:r>
           </a:p>
         </p:txBody>
@@ -7511,7 +7513,7 @@
               </a:defRPr>
             </a:pPr>
             <a:r>
-              <a:t>Profils tres differents selon la dynamique des orages locaux</a:t>
+              <a:t>Profils tres differents selon la dynamique locale des orages</a:t>
             </a:r>
           </a:p>
         </p:txBody>
@@ -8214,7 +8216,7 @@
                   <a:srgbClr val="000000"/>
                 </a:solidFill>
               </a:rPr>
-              <a:t>  - Bastia et Pise : orages denses et longs -&gt; plus de risque (~19 %).</a:t>
+              <a:t>   - Bastia : MEILLEUR RATIO. 62 h gagnees pour seulement 7,4 % de risque.</a:t>
             </a:r>
           </a:p>
           <a:p>
@@ -8224,7 +8226,7 @@
                   <a:srgbClr val="000000"/>
                 </a:solidFill>
               </a:rPr>
-              <a:t>  - Ajaccio : profil le plus calme -&gt; risque minimal (~9 %), gain modere.</a:t>
+              <a:t>   - Pise   : GAIN ABSOLU MAX (83 h) mais aussi le risque le plus eleve (26 %).</a:t>
             </a:r>
           </a:p>
           <a:p>
@@ -8234,8 +8236,15 @@
                   <a:srgbClr val="A83232"/>
                 </a:solidFill>
               </a:rPr>
-              <a:t>  - Toutes les alertes evaluees (973 au total).</a:t>
-            </a:r>
+              <a:t>             Orages denses qui rendent T_q plus aggressif.</a:t>
+            </a:r>
+          </a:p>
+          <a:p>
+            <a:endParaRPr sz="1400" b="1">
+              <a:solidFill>
+                <a:srgbClr val="A83232"/>
+              </a:solidFill>
+            </a:endParaRPr>
           </a:p>
           <a:p>
             <a:r>
@@ -8244,6 +8253,16 @@
                   <a:srgbClr val="A83232"/>
                 </a:solidFill>
               </a:rPr>
+              <a:t>   - Ajaccio et Biarritz : profils intermediaires.</a:t>
+            </a:r>
+          </a:p>
+          <a:p>
+            <a:r>
+              <a:rPr sz="1400" b="1">
+                <a:solidFill>
+                  <a:srgbClr val="A83232"/>
+                </a:solidFill>
+              </a:rPr>
               <a:t/>
             </a:r>
           </a:p>
@@ -8254,27 +8273,7 @@
                   <a:srgbClr val="A83232"/>
                 </a:solidFill>
               </a:rPr>
-              <a:t>Le timer effectif moyen ~27 min est tres proche du T_min=25. Donc le modele</a:t>
-            </a:r>
-          </a:p>
-          <a:p>
-            <a:r>
-              <a:rPr sz="1400" b="1">
-                <a:solidFill>
-                  <a:srgbClr val="A83232"/>
-                </a:solidFill>
-              </a:rPr>
-              <a:t>est souvent appele a lever au plancher : preuve que sans T_min, le modele</a:t>
-            </a:r>
-          </a:p>
-          <a:p>
-            <a:r>
-              <a:rPr sz="1400" b="1">
-                <a:solidFill>
-                  <a:srgbClr val="A83232"/>
-                </a:solidFill>
-              </a:rPr>
-              <a:t>leverait beaucoup trop tot.</a:t>
+              <a:t>Total : 251 h / 17,14 % sur les 973 alertes de l'eval 2023-25.</a:t>
             </a:r>
           </a:p>
           <a:p>
@@ -10216,7 +10215,7 @@
             </a:pPr>
             <a:r>
               <a:rPr sz="1300" b="0"/>
-              <a:t>   . Weibull AFT entraine par MLE (gere la censure native)</a:t>
+              <a:t>   . Weibull AFT entraine par MLE avec gestion native de la censure 30 min</a:t>
             </a:r>
           </a:p>
           <a:p>
@@ -10227,7 +10226,7 @@
             </a:pPr>
             <a:r>
               <a:rPr sz="1300" b="0"/>
-              <a:t>   . 17 variables dont rythme = 57 % du pouvoir predictif</a:t>
+              <a:t>   . 17 variables dont le rythme concentre 57 % du pouvoir predictif</a:t>
             </a:r>
           </a:p>
           <a:p>
@@ -10249,7 +10248,7 @@
             </a:pPr>
             <a:r>
               <a:rPr sz="1500" b="0"/>
-              <a:t>   . Simulation operationnelle reelle (timer CG par CG, plancher T_min)</a:t>
+              <a:t>   . Simulation operationnelle reelle (timer CG par CG + plancher T_min)</a:t>
             </a:r>
           </a:p>
           <a:p>
@@ -10258,14 +10257,7 @@
                 <a:spcPts val="400"/>
               </a:spcAft>
             </a:pPr>
-            <a:r>
-              <a:rPr sz="1500" b="1">
-                <a:solidFill>
-                  <a:srgbClr val="2C8C5A"/>
-                </a:solidFill>
-              </a:rPr>
-              <a:t/>
-            </a:r>
+            <a:endParaRPr sz="1500" b="0"/>
           </a:p>
           <a:p>
             <a:pPr lvl="1">
@@ -10279,7 +10271,7 @@
                   <a:srgbClr val="2C8C5A"/>
                 </a:solidFill>
               </a:rPr>
-              <a:t>- Ce qu'on gagne sur eval 2023-25 (973 alertes, q=0,95)</a:t>
+              <a:t>- Ce qu'on gagne sur eval 2023-25 (973 alertes, q=0,95, CG-only strict)</a:t>
             </a:r>
           </a:p>
           <a:p>
@@ -10294,7 +10286,7 @@
                   <a:srgbClr val="2C8C5A"/>
                 </a:solidFill>
               </a:rPr>
-              <a:t>   . T_min=25 (RECOMMANDE) : 251 h gain, 17 % risque CG (66/385)</a:t>
+              <a:t>   . T_min = 25 (recommande) : 251 h gain, 17,14 % risque CG (66/385)</a:t>
             </a:r>
           </a:p>
           <a:p>
@@ -10309,7 +10301,7 @@
                   <a:srgbClr val="595959"/>
                 </a:solidFill>
               </a:rPr>
-              <a:t>   . T_min=20 (agressif)   : 365 h gain, 28 % risque</a:t>
+              <a:t>   . T_min = 20 (agressif)   : 365 h gain, 28,05 %</a:t>
             </a:r>
           </a:p>
           <a:p>
@@ -10320,7 +10312,7 @@
             </a:pPr>
             <a:r>
               <a:rPr sz="1500" b="0"/>
-              <a:t>   . T_min=30 (prudent)    : 136 h gain,  9 % risque</a:t>
+              <a:t>   . T_min = 30 (~ baseline) : 136 h gain,  8,57 %</a:t>
             </a:r>
           </a:p>
           <a:p>
@@ -10335,7 +10327,7 @@
                   <a:srgbClr val="1F4E79"/>
                 </a:solidFill>
               </a:rPr>
-              <a:t>   . Baseline 30 min Meteorage : 0 h, 0 % (reference parfaite)</a:t>
+              <a:t>   . Baseline 30 min stricte : 0 h, 0 % (reference)</a:t>
             </a:r>
           </a:p>
           <a:p>
@@ -10344,10 +10336,11 @@
                 <a:spcPts val="400"/>
               </a:spcAft>
             </a:pPr>
-            <a:r>
-              <a:rPr sz="1300" b="0"/>
-              <a:t/>
-            </a:r>
+            <a:endParaRPr sz="1500" b="1">
+              <a:solidFill>
+                <a:srgbClr val="1F4E79"/>
+              </a:solidFill>
+            </a:endParaRPr>
           </a:p>
           <a:p>
             <a:pPr lvl="1">
@@ -10357,7 +10350,7 @@
             </a:pPr>
             <a:r>
               <a:rPr sz="1300" b="0"/>
-              <a:t>- Limites assumees</a:t>
+              <a:t>- Limite assumee et perspective</a:t>
             </a:r>
           </a:p>
           <a:p>
@@ -10368,7 +10361,7 @@
             </a:pPr>
             <a:r>
               <a:rPr sz="1300" b="0"/>
-              <a:t>   . Sans plancher T_min, le modele leverait trop tot (88 % risque)</a:t>
+              <a:t>   . Cible 2 % non atteinte avec le modele pur</a:t>
             </a:r>
           </a:p>
           <a:p>
@@ -10379,7 +10372,7 @@
             </a:pPr>
             <a:r>
               <a:rPr sz="1300" b="0"/>
-              <a:t>   . Pour atteindre R &lt; 2 % : classifieur secondaire 'dernier CG' a developper</a:t>
+              <a:t>   . Solution : classifieur secondaire 'ce CG est-il le dernier ?'</a:t>
             </a:r>
           </a:p>
           <a:p>
@@ -10390,7 +10383,7 @@
             </a:pPr>
             <a:r>
               <a:rPr sz="1300" b="0"/>
-              <a:t>   . Demo interactive permet d'inspecter chaque cas concret</a:t>
+              <a:t>     pour filtrer les CG du milieu d'orage et reduire les levees prematurees</a:t>
             </a:r>
           </a:p>
         </p:txBody>

--- a/presentation_oral.pptx
+++ b/presentation_oral.pptx
@@ -149,7 +149,7 @@
   <pc:docChgLst>
     <pc:chgData name="Enrique Alves" userId="5d13ffe67fcee0a0" providerId="LiveId" clId="{6B2B118D-CA2E-4A9B-BC7D-9BAAFE503825}"/>
     <pc:docChg chg="modSld">
-      <pc:chgData name="Enrique Alves" userId="5d13ffe67fcee0a0" providerId="LiveId" clId="{6B2B118D-CA2E-4A9B-BC7D-9BAAFE503825}" dt="2026-05-21T22:37:32.013" v="32" actId="20577"/>
+      <pc:chgData name="Enrique Alves" userId="5d13ffe67fcee0a0" providerId="LiveId" clId="{6B2B118D-CA2E-4A9B-BC7D-9BAAFE503825}" dt="2026-05-22T05:04:54.127" v="90" actId="20577"/>
       <pc:docMkLst>
         <pc:docMk/>
       </pc:docMkLst>
@@ -254,13 +254,61 @@
         </pc:graphicFrameChg>
       </pc:sldChg>
       <pc:sldChg chg="modSp mod">
-        <pc:chgData name="Enrique Alves" userId="5d13ffe67fcee0a0" providerId="LiveId" clId="{6B2B118D-CA2E-4A9B-BC7D-9BAAFE503825}" dt="2026-05-21T17:34:57.954" v="8" actId="1076"/>
+        <pc:chgData name="Enrique Alves" userId="5d13ffe67fcee0a0" providerId="LiveId" clId="{6B2B118D-CA2E-4A9B-BC7D-9BAAFE503825}" dt="2026-05-22T05:04:33.868" v="78" actId="20577"/>
         <pc:sldMkLst>
           <pc:docMk/>
           <pc:sldMk cId="0" sldId="270"/>
         </pc:sldMkLst>
+        <pc:spChg chg="mod">
+          <ac:chgData name="Enrique Alves" userId="5d13ffe67fcee0a0" providerId="LiveId" clId="{6B2B118D-CA2E-4A9B-BC7D-9BAAFE503825}" dt="2026-05-22T05:04:33.868" v="78" actId="20577"/>
+          <ac:spMkLst>
+            <pc:docMk/>
+            <pc:sldMk cId="0" sldId="270"/>
+            <ac:spMk id="2" creationId="{00000000-0000-0000-0000-000000000000}"/>
+          </ac:spMkLst>
+        </pc:spChg>
+        <pc:spChg chg="mod">
+          <ac:chgData name="Enrique Alves" userId="5d13ffe67fcee0a0" providerId="LiveId" clId="{6B2B118D-CA2E-4A9B-BC7D-9BAAFE503825}" dt="2026-05-22T05:04:11.068" v="38" actId="1076"/>
+          <ac:spMkLst>
+            <pc:docMk/>
+            <pc:sldMk cId="0" sldId="270"/>
+            <ac:spMk id="3" creationId="{00000000-0000-0000-0000-000000000000}"/>
+          </ac:spMkLst>
+        </pc:spChg>
+        <pc:spChg chg="mod">
+          <ac:chgData name="Enrique Alves" userId="5d13ffe67fcee0a0" providerId="LiveId" clId="{6B2B118D-CA2E-4A9B-BC7D-9BAAFE503825}" dt="2026-05-22T05:03:43.655" v="37" actId="1076"/>
+          <ac:spMkLst>
+            <pc:docMk/>
+            <pc:sldMk cId="0" sldId="270"/>
+            <ac:spMk id="4" creationId="{00000000-0000-0000-0000-000000000000}"/>
+          </ac:spMkLst>
+        </pc:spChg>
+        <pc:spChg chg="mod">
+          <ac:chgData name="Enrique Alves" userId="5d13ffe67fcee0a0" providerId="LiveId" clId="{6B2B118D-CA2E-4A9B-BC7D-9BAAFE503825}" dt="2026-05-22T05:03:32.248" v="35" actId="1076"/>
+          <ac:spMkLst>
+            <pc:docMk/>
+            <pc:sldMk cId="0" sldId="270"/>
+            <ac:spMk id="5" creationId="{00000000-0000-0000-0000-000000000000}"/>
+          </ac:spMkLst>
+        </pc:spChg>
+        <pc:spChg chg="mod">
+          <ac:chgData name="Enrique Alves" userId="5d13ffe67fcee0a0" providerId="LiveId" clId="{6B2B118D-CA2E-4A9B-BC7D-9BAAFE503825}" dt="2026-05-22T05:03:35.552" v="36" actId="1076"/>
+          <ac:spMkLst>
+            <pc:docMk/>
+            <pc:sldMk cId="0" sldId="270"/>
+            <ac:spMk id="6" creationId="{00000000-0000-0000-0000-000000000000}"/>
+          </ac:spMkLst>
+        </pc:spChg>
+        <pc:spChg chg="mod">
+          <ac:chgData name="Enrique Alves" userId="5d13ffe67fcee0a0" providerId="LiveId" clId="{6B2B118D-CA2E-4A9B-BC7D-9BAAFE503825}" dt="2026-05-22T05:03:23.913" v="33" actId="1076"/>
+          <ac:spMkLst>
+            <pc:docMk/>
+            <pc:sldMk cId="0" sldId="270"/>
+            <ac:spMk id="8" creationId="{00000000-0000-0000-0000-000000000000}"/>
+          </ac:spMkLst>
+        </pc:spChg>
         <pc:picChg chg="mod">
-          <ac:chgData name="Enrique Alves" userId="5d13ffe67fcee0a0" providerId="LiveId" clId="{6B2B118D-CA2E-4A9B-BC7D-9BAAFE503825}" dt="2026-05-21T17:34:57.954" v="8" actId="1076"/>
+          <ac:chgData name="Enrique Alves" userId="5d13ffe67fcee0a0" providerId="LiveId" clId="{6B2B118D-CA2E-4A9B-BC7D-9BAAFE503825}" dt="2026-05-22T05:03:28.230" v="34" actId="1076"/>
           <ac:picMkLst>
             <pc:docMk/>
             <pc:sldMk cId="0" sldId="270"/>
@@ -269,13 +317,13 @@
         </pc:picChg>
       </pc:sldChg>
       <pc:sldChg chg="modSp mod">
-        <pc:chgData name="Enrique Alves" userId="5d13ffe67fcee0a0" providerId="LiveId" clId="{6B2B118D-CA2E-4A9B-BC7D-9BAAFE503825}" dt="2026-05-21T22:37:32.013" v="32" actId="20577"/>
+        <pc:chgData name="Enrique Alves" userId="5d13ffe67fcee0a0" providerId="LiveId" clId="{6B2B118D-CA2E-4A9B-BC7D-9BAAFE503825}" dt="2026-05-22T05:04:54.127" v="90" actId="20577"/>
         <pc:sldMkLst>
           <pc:docMk/>
           <pc:sldMk cId="0" sldId="271"/>
         </pc:sldMkLst>
         <pc:graphicFrameChg chg="modGraphic">
-          <ac:chgData name="Enrique Alves" userId="5d13ffe67fcee0a0" providerId="LiveId" clId="{6B2B118D-CA2E-4A9B-BC7D-9BAAFE503825}" dt="2026-05-21T22:37:32.013" v="32" actId="20577"/>
+          <ac:chgData name="Enrique Alves" userId="5d13ffe67fcee0a0" providerId="LiveId" clId="{6B2B118D-CA2E-4A9B-BC7D-9BAAFE503825}" dt="2026-05-22T05:04:54.127" v="90" actId="20577"/>
           <ac:graphicFrameMkLst>
             <pc:docMk/>
             <pc:sldMk cId="0" sldId="271"/>
@@ -6275,7 +6323,7 @@
         <p:spPr>
           <a:xfrm>
             <a:off x="457200" y="228600"/>
-            <a:ext cx="11247120" cy="594360"/>
+            <a:ext cx="10176760" cy="2092881"/>
           </a:xfrm>
           <a:prstGeom prst="rect">
             <a:avLst/>
@@ -6296,7 +6344,24 @@
               </a:defRPr>
             </a:pPr>
             <a:r>
-              <a:t>INCIDENT = CG &lt;3 km arrivant APRES notre levee. IC ne comptent pas (features seulement).</a:t>
+              <a:rPr dirty="0"/>
+              <a:t>INCIDENT = CG &lt;3 km </a:t>
+            </a:r>
+            <a:r>
+              <a:rPr dirty="0" err="1"/>
+              <a:t>arrivant</a:t>
+            </a:r>
+            <a:r>
+              <a:rPr dirty="0"/>
+              <a:t> APRES </a:t>
+            </a:r>
+            <a:r>
+              <a:rPr dirty="0" err="1"/>
+              <a:t>notre</a:t>
+            </a:r>
+            <a:r>
+              <a:rPr dirty="0"/>
+              <a:t> levee. </a:t>
             </a:r>
           </a:p>
           <a:p>
@@ -6308,7 +6373,48 @@
               </a:defRPr>
             </a:pPr>
             <a:r>
-              <a:t>Le plancher T_min est le levier operationnel ajustable par l operateur :</a:t>
+              <a:rPr dirty="0"/>
+              <a:t>Le </a:t>
+            </a:r>
+            <a:r>
+              <a:rPr dirty="0" err="1"/>
+              <a:t>plancher</a:t>
+            </a:r>
+            <a:r>
+              <a:rPr dirty="0"/>
+              <a:t> </a:t>
+            </a:r>
+            <a:r>
+              <a:rPr dirty="0" err="1"/>
+              <a:t>T_min</a:t>
+            </a:r>
+            <a:r>
+              <a:rPr dirty="0"/>
+              <a:t> est le levier </a:t>
+            </a:r>
+            <a:r>
+              <a:rPr dirty="0" err="1"/>
+              <a:t>operationnel</a:t>
+            </a:r>
+            <a:r>
+              <a:rPr dirty="0"/>
+              <a:t> </a:t>
+            </a:r>
+            <a:r>
+              <a:rPr dirty="0" err="1"/>
+              <a:t>ajustable</a:t>
+            </a:r>
+            <a:r>
+              <a:rPr dirty="0"/>
+              <a:t> par l </a:t>
+            </a:r>
+            <a:r>
+              <a:rPr dirty="0" err="1"/>
+              <a:t>operateur</a:t>
+            </a:r>
+            <a:r>
+              <a:rPr dirty="0"/>
+              <a:t> :</a:t>
             </a:r>
           </a:p>
           <a:p>
@@ -6320,7 +6426,40 @@
               </a:defRPr>
             </a:pPr>
             <a:r>
-              <a:t>   T_min = 0  -&gt; modele pur (risque max, gain max).</a:t>
+              <a:rPr dirty="0"/>
+              <a:t>   </a:t>
+            </a:r>
+            <a:r>
+              <a:rPr dirty="0" err="1"/>
+              <a:t>T_min</a:t>
+            </a:r>
+            <a:r>
+              <a:rPr dirty="0"/>
+              <a:t> = 0  -&gt; </a:t>
+            </a:r>
+            <a:r>
+              <a:rPr dirty="0" err="1"/>
+              <a:t>modele</a:t>
+            </a:r>
+            <a:r>
+              <a:rPr dirty="0"/>
+              <a:t> </a:t>
+            </a:r>
+            <a:r>
+              <a:rPr dirty="0" err="1"/>
+              <a:t>pur</a:t>
+            </a:r>
+            <a:r>
+              <a:rPr dirty="0"/>
+              <a:t> (</a:t>
+            </a:r>
+            <a:r>
+              <a:rPr dirty="0" err="1"/>
+              <a:t>risque</a:t>
+            </a:r>
+            <a:r>
+              <a:rPr dirty="0"/>
+              <a:t> max, gain max).</a:t>
             </a:r>
           </a:p>
           <a:p>
@@ -6332,7 +6471,32 @@
               </a:defRPr>
             </a:pPr>
             <a:r>
-              <a:t>   T_min = 25 -&gt; compromis recommande.</a:t>
+              <a:rPr dirty="0"/>
+              <a:t>   </a:t>
+            </a:r>
+            <a:r>
+              <a:rPr dirty="0" err="1"/>
+              <a:t>T_min</a:t>
+            </a:r>
+            <a:r>
+              <a:rPr dirty="0"/>
+              <a:t> = 25 -&gt; </a:t>
+            </a:r>
+            <a:r>
+              <a:rPr dirty="0" err="1"/>
+              <a:t>compromis</a:t>
+            </a:r>
+            <a:r>
+              <a:rPr dirty="0"/>
+              <a:t> </a:t>
+            </a:r>
+            <a:r>
+              <a:rPr dirty="0" err="1"/>
+              <a:t>recommande</a:t>
+            </a:r>
+            <a:r>
+              <a:rPr dirty="0"/>
+              <a:t>.</a:t>
             </a:r>
           </a:p>
           <a:p>
@@ -6344,7 +6508,32 @@
               </a:defRPr>
             </a:pPr>
             <a:r>
-              <a:t>   T_min = 30 -&gt; baseline Meteorage (risque ~0, gain ~0).</a:t>
+              <a:rPr dirty="0"/>
+              <a:t>   </a:t>
+            </a:r>
+            <a:r>
+              <a:rPr dirty="0" err="1"/>
+              <a:t>T_min</a:t>
+            </a:r>
+            <a:r>
+              <a:rPr dirty="0"/>
+              <a:t> = 30 -&gt; baseline </a:t>
+            </a:r>
+            <a:r>
+              <a:rPr dirty="0" err="1"/>
+              <a:t>Meteorage</a:t>
+            </a:r>
+            <a:r>
+              <a:rPr dirty="0"/>
+              <a:t> (</a:t>
+            </a:r>
+            <a:r>
+              <a:rPr dirty="0" err="1"/>
+              <a:t>risque</a:t>
+            </a:r>
+            <a:r>
+              <a:rPr dirty="0"/>
+              <a:t> ~0, gain ~0).</a:t>
             </a:r>
           </a:p>
         </p:txBody>
@@ -6357,7 +6546,7 @@
         </p:nvSpPr>
         <p:spPr>
           <a:xfrm>
-            <a:off x="457200" y="777240"/>
+            <a:off x="2697480" y="4869914"/>
             <a:ext cx="11247120" cy="457200"/>
           </a:xfrm>
           <a:prstGeom prst="rect">
@@ -6379,7 +6568,48 @@
               </a:defRPr>
             </a:pPr>
             <a:r>
-              <a:t>A chaque CG : timer = max(T_q, T_min). Reset si nouveau CG. Lift si timer expire.</a:t>
+              <a:rPr dirty="0"/>
+              <a:t>A </a:t>
+            </a:r>
+            <a:r>
+              <a:rPr dirty="0" err="1"/>
+              <a:t>chaque</a:t>
+            </a:r>
+            <a:r>
+              <a:rPr dirty="0"/>
+              <a:t> CG : timer = max(</a:t>
+            </a:r>
+            <a:r>
+              <a:rPr dirty="0" err="1"/>
+              <a:t>T_q</a:t>
+            </a:r>
+            <a:r>
+              <a:rPr dirty="0"/>
+              <a:t>, </a:t>
+            </a:r>
+            <a:r>
+              <a:rPr dirty="0" err="1"/>
+              <a:t>T_min</a:t>
+            </a:r>
+            <a:r>
+              <a:rPr dirty="0"/>
+              <a:t>). Reset </a:t>
+            </a:r>
+            <a:r>
+              <a:rPr dirty="0" err="1"/>
+              <a:t>si</a:t>
+            </a:r>
+            <a:r>
+              <a:rPr dirty="0"/>
+              <a:t> nouveau CG. Lift </a:t>
+            </a:r>
+            <a:r>
+              <a:rPr dirty="0" err="1"/>
+              <a:t>si</a:t>
+            </a:r>
+            <a:r>
+              <a:rPr dirty="0"/>
+              <a:t> timer expire.</a:t>
             </a:r>
           </a:p>
         </p:txBody>
@@ -6392,7 +6622,7 @@
         </p:nvSpPr>
         <p:spPr>
           <a:xfrm>
-            <a:off x="457200" y="1554480"/>
+            <a:off x="470852" y="2370666"/>
             <a:ext cx="3749039" cy="2103120"/>
           </a:xfrm>
           <a:prstGeom prst="roundRect">
@@ -6422,7 +6652,7 @@
           <a:p>
             <a:pPr algn="ctr"/>
             <a:r>
-              <a:rPr sz="3200" b="1">
+              <a:rPr sz="3200" b="1" dirty="0">
                 <a:solidFill>
                   <a:srgbClr val="FFFFFF"/>
                 </a:solidFill>
@@ -6433,7 +6663,7 @@
           <a:p>
             <a:pPr algn="ctr"/>
             <a:r>
-              <a:rPr sz="1600" b="1">
+              <a:rPr sz="1600" b="1" dirty="0">
                 <a:solidFill>
                   <a:srgbClr val="FFFFFF"/>
                 </a:solidFill>
@@ -6444,15 +6674,76 @@
           <a:p>
             <a:pPr algn="ctr"/>
             <a:r>
-              <a:rPr sz="1200">
+              <a:rPr sz="1200" dirty="0">
                 <a:solidFill>
                   <a:srgbClr val="FFFFFF"/>
                 </a:solidFill>
               </a:rPr>
               <a:t>
-Un CG est détecté en zone 20 km autour
-de l'aéroport</a:t>
-            </a:r>
+Un CG est </a:t>
+            </a:r>
+            <a:r>
+              <a:rPr sz="1200" dirty="0" err="1">
+                <a:solidFill>
+                  <a:srgbClr val="FFFFFF"/>
+                </a:solidFill>
+              </a:rPr>
+              <a:t>détecté</a:t>
+            </a:r>
+            <a:r>
+              <a:rPr sz="1200" dirty="0">
+                <a:solidFill>
+                  <a:srgbClr val="FFFFFF"/>
+                </a:solidFill>
+              </a:rPr>
+              <a:t> </a:t>
+            </a:r>
+            <a:r>
+              <a:rPr sz="1200" dirty="0" err="1">
+                <a:solidFill>
+                  <a:srgbClr val="FFFFFF"/>
+                </a:solidFill>
+              </a:rPr>
+              <a:t>en</a:t>
+            </a:r>
+            <a:r>
+              <a:rPr sz="1200" dirty="0">
+                <a:solidFill>
+                  <a:srgbClr val="FFFFFF"/>
+                </a:solidFill>
+              </a:rPr>
+              <a:t> zone 20 km </a:t>
+            </a:r>
+            <a:r>
+              <a:rPr sz="1200" dirty="0" err="1">
+                <a:solidFill>
+                  <a:srgbClr val="FFFFFF"/>
+                </a:solidFill>
+              </a:rPr>
+              <a:t>autour</a:t>
+            </a:r>
+            <a:r>
+              <a:rPr sz="1200" dirty="0">
+                <a:solidFill>
+                  <a:srgbClr val="FFFFFF"/>
+                </a:solidFill>
+              </a:rPr>
+              <a:t>
+de </a:t>
+            </a:r>
+            <a:r>
+              <a:rPr sz="1200" dirty="0" err="1">
+                <a:solidFill>
+                  <a:srgbClr val="FFFFFF"/>
+                </a:solidFill>
+              </a:rPr>
+              <a:t>l'aéroport</a:t>
+            </a:r>
+            <a:endParaRPr sz="1200" dirty="0">
+              <a:solidFill>
+                <a:srgbClr val="FFFFFF"/>
+              </a:solidFill>
+            </a:endParaRPr>
           </a:p>
         </p:txBody>
       </p:sp>
@@ -6464,7 +6755,7 @@
         </p:nvSpPr>
         <p:spPr>
           <a:xfrm>
-            <a:off x="4389120" y="1554480"/>
+            <a:off x="4389120" y="2377440"/>
             <a:ext cx="3749039" cy="2103120"/>
           </a:xfrm>
           <a:prstGeom prst="roundRect">
@@ -6494,7 +6785,7 @@
           <a:p>
             <a:pPr algn="ctr"/>
             <a:r>
-              <a:rPr sz="3200" b="1">
+              <a:rPr sz="3200" b="1" dirty="0">
                 <a:solidFill>
                   <a:srgbClr val="FFFFFF"/>
                 </a:solidFill>
@@ -6505,26 +6796,108 @@
           <a:p>
             <a:pPr algn="ctr"/>
             <a:r>
-              <a:rPr sz="1600" b="1">
+              <a:rPr sz="1600" b="1" dirty="0" err="1">
                 <a:solidFill>
                   <a:srgbClr val="FFFFFF"/>
                 </a:solidFill>
               </a:rPr>
               <a:t>Prédiction</a:t>
             </a:r>
+            <a:endParaRPr sz="1600" b="1" dirty="0">
+              <a:solidFill>
+                <a:srgbClr val="FFFFFF"/>
+              </a:solidFill>
+            </a:endParaRPr>
           </a:p>
           <a:p>
             <a:pPr algn="ctr"/>
             <a:r>
-              <a:rPr sz="1200">
+              <a:rPr sz="1200" dirty="0">
                 <a:solidFill>
                   <a:srgbClr val="FFFFFF"/>
                 </a:solidFill>
               </a:rPr>
               <a:t>
-Le modèle calcule T_q(X) :
-le temps d'attente recommandé</a:t>
-            </a:r>
+Le </a:t>
+            </a:r>
+            <a:r>
+              <a:rPr sz="1200" dirty="0" err="1">
+                <a:solidFill>
+                  <a:srgbClr val="FFFFFF"/>
+                </a:solidFill>
+              </a:rPr>
+              <a:t>modèle</a:t>
+            </a:r>
+            <a:r>
+              <a:rPr sz="1200" dirty="0">
+                <a:solidFill>
+                  <a:srgbClr val="FFFFFF"/>
+                </a:solidFill>
+              </a:rPr>
+              <a:t> </a:t>
+            </a:r>
+            <a:r>
+              <a:rPr sz="1200" dirty="0" err="1">
+                <a:solidFill>
+                  <a:srgbClr val="FFFFFF"/>
+                </a:solidFill>
+              </a:rPr>
+              <a:t>calcule</a:t>
+            </a:r>
+            <a:r>
+              <a:rPr sz="1200" dirty="0">
+                <a:solidFill>
+                  <a:srgbClr val="FFFFFF"/>
+                </a:solidFill>
+              </a:rPr>
+              <a:t> </a:t>
+            </a:r>
+            <a:r>
+              <a:rPr sz="1200" dirty="0" err="1">
+                <a:solidFill>
+                  <a:srgbClr val="FFFFFF"/>
+                </a:solidFill>
+              </a:rPr>
+              <a:t>T_q</a:t>
+            </a:r>
+            <a:r>
+              <a:rPr sz="1200" dirty="0">
+                <a:solidFill>
+                  <a:srgbClr val="FFFFFF"/>
+                </a:solidFill>
+              </a:rPr>
+              <a:t>(X) :
+le temps </a:t>
+            </a:r>
+            <a:r>
+              <a:rPr sz="1200" dirty="0" err="1">
+                <a:solidFill>
+                  <a:srgbClr val="FFFFFF"/>
+                </a:solidFill>
+              </a:rPr>
+              <a:t>d'attente</a:t>
+            </a:r>
+            <a:r>
+              <a:rPr sz="1200" dirty="0">
+                <a:solidFill>
+                  <a:srgbClr val="FFFFFF"/>
+                </a:solidFill>
+              </a:rPr>
+              <a:t> </a:t>
+            </a:r>
+            <a:r>
+              <a:rPr sz="1200" dirty="0" err="1">
+                <a:solidFill>
+                  <a:srgbClr val="FFFFFF"/>
+                </a:solidFill>
+              </a:rPr>
+              <a:t>recommandé</a:t>
+            </a:r>
+            <a:endParaRPr sz="1200" dirty="0">
+              <a:solidFill>
+                <a:srgbClr val="FFFFFF"/>
+              </a:solidFill>
+            </a:endParaRPr>
           </a:p>
         </p:txBody>
       </p:sp>
@@ -6536,7 +6909,7 @@
         </p:nvSpPr>
         <p:spPr>
           <a:xfrm>
-            <a:off x="8321040" y="1554480"/>
+            <a:off x="8321040" y="2374053"/>
             <a:ext cx="3749039" cy="2103120"/>
           </a:xfrm>
           <a:prstGeom prst="roundRect">
@@ -6566,7 +6939,7 @@
           <a:p>
             <a:pPr algn="ctr"/>
             <a:r>
-              <a:rPr sz="3200" b="1">
+              <a:rPr sz="3200" b="1" dirty="0">
                 <a:solidFill>
                   <a:srgbClr val="FFFFFF"/>
                 </a:solidFill>
@@ -6577,24 +6950,45 @@
           <a:p>
             <a:pPr algn="ctr"/>
             <a:r>
-              <a:rPr sz="1600" b="1">
+              <a:rPr sz="1600" b="1" dirty="0" err="1">
                 <a:solidFill>
                   <a:srgbClr val="FFFFFF"/>
                 </a:solidFill>
               </a:rPr>
               <a:t>Décision</a:t>
             </a:r>
+            <a:endParaRPr sz="1600" b="1" dirty="0">
+              <a:solidFill>
+                <a:srgbClr val="FFFFFF"/>
+              </a:solidFill>
+            </a:endParaRPr>
           </a:p>
           <a:p>
             <a:pPr algn="ctr"/>
             <a:r>
-              <a:rPr sz="1200">
+              <a:rPr sz="1200" dirty="0">
                 <a:solidFill>
                   <a:srgbClr val="FFFFFF"/>
                 </a:solidFill>
               </a:rPr>
               <a:t>
-Si T_q min de silence : LEVÉE
+Si </a:t>
+            </a:r>
+            <a:r>
+              <a:rPr sz="1200" dirty="0" err="1">
+                <a:solidFill>
+                  <a:srgbClr val="FFFFFF"/>
+                </a:solidFill>
+              </a:rPr>
+              <a:t>T_q</a:t>
+            </a:r>
+            <a:r>
+              <a:rPr sz="1200" dirty="0">
+                <a:solidFill>
+                  <a:srgbClr val="FFFFFF"/>
+                </a:solidFill>
+              </a:rPr>
+              <a:t> min de silence : LEVÉE
 Sinon (nouveau CG) : RESET</a:t>
             </a:r>
           </a:p>
@@ -6616,7 +7010,7 @@
         </p:blipFill>
         <p:spPr>
           <a:xfrm>
-            <a:off x="484505" y="3804695"/>
+            <a:off x="484505" y="4558228"/>
             <a:ext cx="11247120" cy="1168850"/>
           </a:xfrm>
           <a:prstGeom prst="rect">
@@ -6632,7 +7026,7 @@
         </p:nvSpPr>
         <p:spPr>
           <a:xfrm>
-            <a:off x="457200" y="5029200"/>
+            <a:off x="470852" y="5638800"/>
             <a:ext cx="11247120" cy="1371600"/>
           </a:xfrm>
           <a:prstGeom prst="rect">
@@ -6648,56 +7042,288 @@
           <a:p>
             <a:pPr algn="ctr"/>
             <a:r>
-              <a:rPr sz="1500" i="1">
+              <a:rPr sz="1500" i="1" dirty="0">
                 <a:solidFill>
                   <a:srgbClr val="595959"/>
                 </a:solidFill>
               </a:rPr>
-              <a:t>INCIDENT = CG &lt;3 km arrivant APRES notre levee predite.</a:t>
+              <a:t>INCIDENT = CG &lt;3 km </a:t>
+            </a:r>
+            <a:r>
+              <a:rPr sz="1500" i="1" dirty="0" err="1">
+                <a:solidFill>
+                  <a:srgbClr val="595959"/>
+                </a:solidFill>
+              </a:rPr>
+              <a:t>arrivant</a:t>
+            </a:r>
+            <a:r>
+              <a:rPr sz="1500" i="1" dirty="0">
+                <a:solidFill>
+                  <a:srgbClr val="595959"/>
+                </a:solidFill>
+              </a:rPr>
+              <a:t> APRES </a:t>
+            </a:r>
+            <a:r>
+              <a:rPr sz="1500" i="1" dirty="0" err="1">
+                <a:solidFill>
+                  <a:srgbClr val="595959"/>
+                </a:solidFill>
+              </a:rPr>
+              <a:t>notre</a:t>
+            </a:r>
+            <a:r>
+              <a:rPr sz="1500" i="1" dirty="0">
+                <a:solidFill>
+                  <a:srgbClr val="595959"/>
+                </a:solidFill>
+              </a:rPr>
+              <a:t> levee </a:t>
+            </a:r>
+            <a:r>
+              <a:rPr sz="1500" i="1" dirty="0" err="1">
+                <a:solidFill>
+                  <a:srgbClr val="595959"/>
+                </a:solidFill>
+              </a:rPr>
+              <a:t>predite</a:t>
+            </a:r>
+            <a:r>
+              <a:rPr sz="1500" i="1" dirty="0">
+                <a:solidFill>
+                  <a:srgbClr val="595959"/>
+                </a:solidFill>
+              </a:rPr>
+              <a:t>.</a:t>
             </a:r>
           </a:p>
           <a:p>
             <a:pPr algn="ctr"/>
             <a:r>
-              <a:rPr sz="1500" b="1">
+              <a:rPr sz="1500" b="1" dirty="0">
                 <a:solidFill>
                   <a:srgbClr val="143656"/>
                 </a:solidFill>
               </a:rPr>
-              <a:t>Le plancher T_min est le levier operationnel : ne jamais lever avant T_min min.</a:t>
+              <a:t>Le </a:t>
+            </a:r>
+            <a:r>
+              <a:rPr sz="1500" b="1" dirty="0" err="1">
+                <a:solidFill>
+                  <a:srgbClr val="143656"/>
+                </a:solidFill>
+              </a:rPr>
+              <a:t>plancher</a:t>
+            </a:r>
+            <a:r>
+              <a:rPr sz="1500" b="1" dirty="0">
+                <a:solidFill>
+                  <a:srgbClr val="143656"/>
+                </a:solidFill>
+              </a:rPr>
+              <a:t> </a:t>
+            </a:r>
+            <a:r>
+              <a:rPr sz="1500" b="1" dirty="0" err="1">
+                <a:solidFill>
+                  <a:srgbClr val="143656"/>
+                </a:solidFill>
+              </a:rPr>
+              <a:t>T_min</a:t>
+            </a:r>
+            <a:r>
+              <a:rPr sz="1500" b="1" dirty="0">
+                <a:solidFill>
+                  <a:srgbClr val="143656"/>
+                </a:solidFill>
+              </a:rPr>
+              <a:t> est le levier </a:t>
+            </a:r>
+            <a:r>
+              <a:rPr sz="1500" b="1" dirty="0" err="1">
+                <a:solidFill>
+                  <a:srgbClr val="143656"/>
+                </a:solidFill>
+              </a:rPr>
+              <a:t>operationnel</a:t>
+            </a:r>
+            <a:r>
+              <a:rPr sz="1500" b="1" dirty="0">
+                <a:solidFill>
+                  <a:srgbClr val="143656"/>
+                </a:solidFill>
+              </a:rPr>
+              <a:t> : ne jamais lever avant </a:t>
+            </a:r>
+            <a:r>
+              <a:rPr sz="1500" b="1" dirty="0" err="1">
+                <a:solidFill>
+                  <a:srgbClr val="143656"/>
+                </a:solidFill>
+              </a:rPr>
+              <a:t>T_min</a:t>
+            </a:r>
+            <a:r>
+              <a:rPr sz="1500" b="1" dirty="0">
+                <a:solidFill>
+                  <a:srgbClr val="143656"/>
+                </a:solidFill>
+              </a:rPr>
+              <a:t> min.</a:t>
             </a:r>
           </a:p>
           <a:p>
             <a:pPr algn="ctr"/>
             <a:r>
-              <a:rPr sz="1500" b="1">
+              <a:rPr sz="1500" b="1" dirty="0" err="1">
                 <a:solidFill>
                   <a:srgbClr val="143656"/>
                 </a:solidFill>
               </a:rPr>
-              <a:t>T_min = 0  -&gt; modele pur (risque max, gain max).</a:t>
+              <a:t>T_min</a:t>
+            </a:r>
+            <a:r>
+              <a:rPr sz="1500" b="1" dirty="0">
+                <a:solidFill>
+                  <a:srgbClr val="143656"/>
+                </a:solidFill>
+              </a:rPr>
+              <a:t> = 0  -&gt; </a:t>
+            </a:r>
+            <a:r>
+              <a:rPr sz="1500" b="1" dirty="0" err="1">
+                <a:solidFill>
+                  <a:srgbClr val="143656"/>
+                </a:solidFill>
+              </a:rPr>
+              <a:t>modele</a:t>
+            </a:r>
+            <a:r>
+              <a:rPr sz="1500" b="1" dirty="0">
+                <a:solidFill>
+                  <a:srgbClr val="143656"/>
+                </a:solidFill>
+              </a:rPr>
+              <a:t> </a:t>
+            </a:r>
+            <a:r>
+              <a:rPr sz="1500" b="1" dirty="0" err="1">
+                <a:solidFill>
+                  <a:srgbClr val="143656"/>
+                </a:solidFill>
+              </a:rPr>
+              <a:t>pur</a:t>
+            </a:r>
+            <a:r>
+              <a:rPr sz="1500" b="1" dirty="0">
+                <a:solidFill>
+                  <a:srgbClr val="143656"/>
+                </a:solidFill>
+              </a:rPr>
+              <a:t> (</a:t>
+            </a:r>
+            <a:r>
+              <a:rPr sz="1500" b="1" dirty="0" err="1">
+                <a:solidFill>
+                  <a:srgbClr val="143656"/>
+                </a:solidFill>
+              </a:rPr>
+              <a:t>risque</a:t>
+            </a:r>
+            <a:r>
+              <a:rPr sz="1500" b="1" dirty="0">
+                <a:solidFill>
+                  <a:srgbClr val="143656"/>
+                </a:solidFill>
+              </a:rPr>
+              <a:t> max, gain max).</a:t>
             </a:r>
           </a:p>
           <a:p>
             <a:pPr algn="ctr"/>
             <a:r>
-              <a:rPr sz="1500" b="1">
+              <a:rPr sz="1500" b="1" dirty="0" err="1">
                 <a:solidFill>
                   <a:srgbClr val="143656"/>
                 </a:solidFill>
               </a:rPr>
-              <a:t>T_min = 30 -&gt; baseline Meteorage (risque min, gain min).</a:t>
+              <a:t>T_min</a:t>
+            </a:r>
+            <a:r>
+              <a:rPr sz="1500" b="1" dirty="0">
+                <a:solidFill>
+                  <a:srgbClr val="143656"/>
+                </a:solidFill>
+              </a:rPr>
+              <a:t> = 30 -&gt; baseline </a:t>
+            </a:r>
+            <a:r>
+              <a:rPr sz="1500" b="1" dirty="0" err="1">
+                <a:solidFill>
+                  <a:srgbClr val="143656"/>
+                </a:solidFill>
+              </a:rPr>
+              <a:t>Meteorage</a:t>
+            </a:r>
+            <a:r>
+              <a:rPr sz="1500" b="1" dirty="0">
+                <a:solidFill>
+                  <a:srgbClr val="143656"/>
+                </a:solidFill>
+              </a:rPr>
+              <a:t> (</a:t>
+            </a:r>
+            <a:r>
+              <a:rPr sz="1500" b="1" dirty="0" err="1">
+                <a:solidFill>
+                  <a:srgbClr val="143656"/>
+                </a:solidFill>
+              </a:rPr>
+              <a:t>risque</a:t>
+            </a:r>
+            <a:r>
+              <a:rPr sz="1500" b="1" dirty="0">
+                <a:solidFill>
+                  <a:srgbClr val="143656"/>
+                </a:solidFill>
+              </a:rPr>
+              <a:t> min, gain min).</a:t>
             </a:r>
           </a:p>
           <a:p>
             <a:pPr algn="ctr"/>
             <a:r>
-              <a:rPr sz="1500" b="1">
+              <a:rPr sz="1500" b="1" dirty="0" err="1">
                 <a:solidFill>
                   <a:srgbClr val="143656"/>
                 </a:solidFill>
               </a:rPr>
-              <a:t>T_min entre les deux : compromis.</a:t>
+              <a:t>T_min</a:t>
+            </a:r>
+            <a:r>
+              <a:rPr sz="1500" b="1" dirty="0">
+                <a:solidFill>
+                  <a:srgbClr val="143656"/>
+                </a:solidFill>
+              </a:rPr>
+              <a:t> entre les deux : </a:t>
+            </a:r>
+            <a:r>
+              <a:rPr sz="1500" b="1" dirty="0" err="1">
+                <a:solidFill>
+                  <a:srgbClr val="143656"/>
+                </a:solidFill>
+              </a:rPr>
+              <a:t>compromis</a:t>
+            </a:r>
+            <a:r>
+              <a:rPr sz="1500" b="1" dirty="0">
+                <a:solidFill>
+                  <a:srgbClr val="143656"/>
+                </a:solidFill>
+              </a:rPr>
+              <a:t>.</a:t>
             </a:r>
           </a:p>
         </p:txBody>
@@ -6806,7 +7432,7 @@
           <p:nvPr>
             <p:extLst>
               <p:ext uri="{D42A27DB-BD31-4B8C-83A1-F6EECF244321}">
-                <p14:modId xmlns:p14="http://schemas.microsoft.com/office/powerpoint/2010/main" val="762178806"/>
+                <p14:modId xmlns:p14="http://schemas.microsoft.com/office/powerpoint/2010/main" val="1810518544"/>
               </p:ext>
             </p:extLst>
           </p:nvPr>
@@ -7194,7 +7820,7 @@
                       <a:pPr algn="ctr"/>
                       <a:r>
                         <a:rPr sz="1300"/>
-                        <a:t>17,14 % ( 66/385) — RECOMMANDE</a:t>
+                        <a:t>17,14 % ( 66/385) </a:t>
                       </a:r>
                     </a:p>
                   </a:txBody>
@@ -7293,19 +7919,6 @@
                         </a:rPr>
                         <a:t> 8,57 % ( 33/385) — ~ baseline</a:t>
                       </a:r>
-                      <a:r>
-                        <a:rPr sz="1300" b="1">
-                          <a:solidFill>
-                            <a:srgbClr val="2C8C5A"/>
-                          </a:solidFill>
-                        </a:rPr>
-                        <a:t/>
-                      </a:r>
-                      <a:endParaRPr sz="1300" b="1" dirty="0">
-                        <a:solidFill>
-                          <a:srgbClr val="2C8C5A"/>
-                        </a:solidFill>
-                      </a:endParaRPr>
                     </a:p>
                   </a:txBody>
                   <a:tcPr/>
@@ -8257,14 +8870,11 @@
             </a:r>
           </a:p>
           <a:p>
-            <a:r>
-              <a:rPr sz="1400" b="1">
-                <a:solidFill>
-                  <a:srgbClr val="A83232"/>
-                </a:solidFill>
-              </a:rPr>
-              <a:t/>
-            </a:r>
+            <a:endParaRPr sz="1400" b="1">
+              <a:solidFill>
+                <a:srgbClr val="A83232"/>
+              </a:solidFill>
+            </a:endParaRPr>
           </a:p>
           <a:p>
             <a:r>
